--- a/docs/JiHajoor_Architecture.pptx
+++ b/docs/JiHajoor_Architecture.pptx
@@ -6,6 +6,7 @@
   </p:sldMasterIdLst>
   <p:sldIdLst>
     <p:sldId id="256" r:id="rId2"/>
+    <p:sldId id="299" r:id="rId50"/>
     <p:sldId id="257" r:id="rId3"/>
     <p:sldId id="258" r:id="rId4"/>
     <p:sldId id="259" r:id="rId5"/>
@@ -6750,6 +6751,10 @@
             <a:prstDash val="solid"/>
           </a:ln>
         </p:spPr>
+        <p:txBody>
+          <a:bodyPr/>
+          <a:p/>
+        </p:txBody>
       </p:sp>
       <p:sp>
         <p:nvSpPr>
@@ -6773,6 +6778,10 @@
             <a:prstDash val="solid"/>
           </a:ln>
         </p:spPr>
+        <p:txBody>
+          <a:bodyPr/>
+          <a:p/>
+        </p:txBody>
       </p:sp>
       <p:sp>
         <p:nvSpPr>
@@ -6796,6 +6805,10 @@
             <a:prstDash val="solid"/>
           </a:ln>
         </p:spPr>
+        <p:txBody>
+          <a:bodyPr/>
+          <a:p/>
+        </p:txBody>
       </p:sp>
       <p:sp>
         <p:nvSpPr>
@@ -6819,6 +6832,10 @@
             <a:prstDash val="solid"/>
           </a:ln>
         </p:spPr>
+        <p:txBody>
+          <a:bodyPr/>
+          <a:p/>
+        </p:txBody>
       </p:sp>
       <p:sp>
         <p:nvSpPr>
@@ -6839,6 +6856,10 @@
           </a:solidFill>
           <a:ln/>
         </p:spPr>
+        <p:txBody>
+          <a:bodyPr/>
+          <a:p/>
+        </p:txBody>
       </p:sp>
       <p:pic>
         <p:nvPicPr>
@@ -6919,6 +6940,10 @@
           </a:solidFill>
           <a:ln/>
         </p:spPr>
+        <p:txBody>
+          <a:bodyPr/>
+          <a:p/>
+        </p:txBody>
       </p:sp>
       <p:pic>
         <p:nvPicPr>
@@ -6999,6 +7024,10 @@
           </a:solidFill>
           <a:ln/>
         </p:spPr>
+        <p:txBody>
+          <a:bodyPr/>
+          <a:p/>
+        </p:txBody>
       </p:sp>
       <p:pic>
         <p:nvPicPr>
@@ -7079,6 +7108,10 @@
           </a:solidFill>
           <a:ln/>
         </p:spPr>
+        <p:txBody>
+          <a:bodyPr/>
+          <a:p/>
+        </p:txBody>
       </p:sp>
       <p:pic>
         <p:nvPicPr>
@@ -7159,6 +7192,10 @@
           </a:solidFill>
           <a:ln/>
         </p:spPr>
+        <p:txBody>
+          <a:bodyPr/>
+          <a:p/>
+        </p:txBody>
       </p:sp>
       <p:pic>
         <p:nvPicPr>
@@ -7383,6 +7420,10 @@
             <a:prstDash val="dash"/>
           </a:ln>
         </p:spPr>
+        <p:txBody>
+          <a:bodyPr/>
+          <a:p/>
+        </p:txBody>
       </p:sp>
       <p:sp>
         <p:nvSpPr>
@@ -7446,6 +7487,10 @@
             <a:prstDash val="dash"/>
           </a:ln>
         </p:spPr>
+        <p:txBody>
+          <a:bodyPr/>
+          <a:p/>
+        </p:txBody>
       </p:sp>
       <p:sp>
         <p:nvSpPr>
@@ -7509,6 +7554,10 @@
             <a:prstDash val="dash"/>
           </a:ln>
         </p:spPr>
+        <p:txBody>
+          <a:bodyPr/>
+          <a:p/>
+        </p:txBody>
       </p:sp>
       <p:sp>
         <p:nvSpPr>
@@ -7572,6 +7621,10 @@
             <a:prstDash val="dash"/>
           </a:ln>
         </p:spPr>
+        <p:txBody>
+          <a:bodyPr/>
+          <a:p/>
+        </p:txBody>
       </p:sp>
       <p:sp>
         <p:nvSpPr>
@@ -7635,6 +7688,10 @@
             <a:prstDash val="dash"/>
           </a:ln>
         </p:spPr>
+        <p:txBody>
+          <a:bodyPr/>
+          <a:p/>
+        </p:txBody>
       </p:sp>
       <p:sp>
         <p:nvSpPr>
@@ -7698,6 +7755,10 @@
             <a:prstDash val="dash"/>
           </a:ln>
         </p:spPr>
+        <p:txBody>
+          <a:bodyPr/>
+          <a:p/>
+        </p:txBody>
       </p:sp>
       <p:sp>
         <p:nvSpPr>
@@ -7761,6 +7822,10 @@
             <a:prstDash val="dash"/>
           </a:ln>
         </p:spPr>
+        <p:txBody>
+          <a:bodyPr/>
+          <a:p/>
+        </p:txBody>
       </p:sp>
       <p:sp>
         <p:nvSpPr>
@@ -7824,6 +7889,10 @@
             <a:prstDash val="dash"/>
           </a:ln>
         </p:spPr>
+        <p:txBody>
+          <a:bodyPr/>
+          <a:p/>
+        </p:txBody>
       </p:sp>
       <p:sp>
         <p:nvSpPr>
@@ -7848,6 +7917,10 @@
             <a:tailEnd type="triangle"/>
           </a:ln>
         </p:spPr>
+        <p:txBody>
+          <a:bodyPr/>
+          <a:p/>
+        </p:txBody>
       </p:sp>
       <p:sp>
         <p:nvSpPr>
@@ -7912,6 +7985,10 @@
             <a:tailEnd type="triangle"/>
           </a:ln>
         </p:spPr>
+        <p:txBody>
+          <a:bodyPr/>
+          <a:p/>
+        </p:txBody>
       </p:sp>
       <p:sp>
         <p:nvSpPr>
@@ -7976,6 +8053,10 @@
             <a:tailEnd type="triangle"/>
           </a:ln>
         </p:spPr>
+        <p:txBody>
+          <a:bodyPr/>
+          <a:p/>
+        </p:txBody>
       </p:sp>
       <p:sp>
         <p:nvSpPr>
@@ -8040,6 +8121,10 @@
             <a:tailEnd type="triangle"/>
           </a:ln>
         </p:spPr>
+        <p:txBody>
+          <a:bodyPr/>
+          <a:p/>
+        </p:txBody>
       </p:sp>
       <p:sp>
         <p:nvSpPr>
@@ -8104,6 +8189,10 @@
             <a:tailEnd type="triangle"/>
           </a:ln>
         </p:spPr>
+        <p:txBody>
+          <a:bodyPr/>
+          <a:p/>
+        </p:txBody>
       </p:sp>
       <p:sp>
         <p:nvSpPr>
@@ -8168,6 +8257,10 @@
             <a:tailEnd type="triangle"/>
           </a:ln>
         </p:spPr>
+        <p:txBody>
+          <a:bodyPr/>
+          <a:p/>
+        </p:txBody>
       </p:sp>
       <p:sp>
         <p:nvSpPr>
@@ -8232,6 +8325,10 @@
             <a:tailEnd type="triangle"/>
           </a:ln>
         </p:spPr>
+        <p:txBody>
+          <a:bodyPr/>
+          <a:p/>
+        </p:txBody>
       </p:sp>
       <p:sp>
         <p:nvSpPr>
@@ -8296,6 +8393,10 @@
             <a:tailEnd type="triangle"/>
           </a:ln>
         </p:spPr>
+        <p:txBody>
+          <a:bodyPr/>
+          <a:p/>
+        </p:txBody>
       </p:sp>
       <p:sp>
         <p:nvSpPr>
@@ -8360,6 +8461,10 @@
             <a:tailEnd type="triangle"/>
           </a:ln>
         </p:spPr>
+        <p:txBody>
+          <a:bodyPr/>
+          <a:p/>
+        </p:txBody>
       </p:sp>
       <p:sp>
         <p:nvSpPr>
@@ -8424,6 +8529,10 @@
             <a:tailEnd type="triangle"/>
           </a:ln>
         </p:spPr>
+        <p:txBody>
+          <a:bodyPr/>
+          <a:p/>
+        </p:txBody>
       </p:sp>
       <p:sp>
         <p:nvSpPr>
@@ -8488,6 +8597,10 @@
             <a:tailEnd type="triangle"/>
           </a:ln>
         </p:spPr>
+        <p:txBody>
+          <a:bodyPr/>
+          <a:p/>
+        </p:txBody>
       </p:sp>
       <p:sp>
         <p:nvSpPr>
@@ -8552,6 +8665,10 @@
             <a:tailEnd type="triangle"/>
           </a:ln>
         </p:spPr>
+        <p:txBody>
+          <a:bodyPr/>
+          <a:p/>
+        </p:txBody>
       </p:sp>
       <p:sp>
         <p:nvSpPr>
@@ -8804,6 +8921,10 @@
             <a:tailEnd type="triangle"/>
           </a:ln>
         </p:spPr>
+        <p:txBody>
+          <a:bodyPr/>
+          <a:p/>
+        </p:txBody>
       </p:sp>
       <p:sp>
         <p:nvSpPr>
@@ -8870,6 +8991,10 @@
             <a:tailEnd type="triangle"/>
           </a:ln>
         </p:spPr>
+        <p:txBody>
+          <a:bodyPr/>
+          <a:p/>
+        </p:txBody>
       </p:sp>
       <p:sp>
         <p:nvSpPr>
@@ -8936,6 +9061,10 @@
             <a:tailEnd type="triangle"/>
           </a:ln>
         </p:spPr>
+        <p:txBody>
+          <a:bodyPr/>
+          <a:p/>
+        </p:txBody>
       </p:sp>
       <p:sp>
         <p:nvSpPr>
@@ -9002,6 +9131,10 @@
             <a:tailEnd type="triangle"/>
           </a:ln>
         </p:spPr>
+        <p:txBody>
+          <a:bodyPr/>
+          <a:p/>
+        </p:txBody>
       </p:sp>
       <p:sp>
         <p:nvSpPr>
@@ -9068,6 +9201,10 @@
             <a:tailEnd type="triangle"/>
           </a:ln>
         </p:spPr>
+        <p:txBody>
+          <a:bodyPr/>
+          <a:p/>
+        </p:txBody>
       </p:sp>
       <p:sp>
         <p:nvSpPr>
@@ -9175,6 +9312,10 @@
             <a:tailEnd type="triangle"/>
           </a:ln>
         </p:spPr>
+        <p:txBody>
+          <a:bodyPr/>
+          <a:p/>
+        </p:txBody>
       </p:sp>
       <p:sp>
         <p:nvSpPr>
@@ -9242,6 +9383,10 @@
             <a:tailEnd type="triangle"/>
           </a:ln>
         </p:spPr>
+        <p:txBody>
+          <a:bodyPr/>
+          <a:p/>
+        </p:txBody>
       </p:sp>
       <p:sp>
         <p:nvSpPr>
@@ -9441,6 +9586,10 @@
           </a:solidFill>
           <a:ln/>
         </p:spPr>
+        <p:txBody>
+          <a:bodyPr/>
+          <a:p/>
+        </p:txBody>
       </p:sp>
       <p:pic>
         <p:nvPicPr>
@@ -9575,6 +9724,10 @@
           </a:solidFill>
           <a:ln/>
         </p:spPr>
+        <p:txBody>
+          <a:bodyPr/>
+          <a:p/>
+        </p:txBody>
       </p:sp>
       <p:pic>
         <p:nvPicPr>
@@ -9709,6 +9862,10 @@
           </a:solidFill>
           <a:ln/>
         </p:spPr>
+        <p:txBody>
+          <a:bodyPr/>
+          <a:p/>
+        </p:txBody>
       </p:sp>
       <p:pic>
         <p:nvPicPr>
@@ -9843,6 +10000,10 @@
           </a:solidFill>
           <a:ln/>
         </p:spPr>
+        <p:txBody>
+          <a:bodyPr/>
+          <a:p/>
+        </p:txBody>
       </p:sp>
       <p:pic>
         <p:nvPicPr>
@@ -9977,6 +10138,10 @@
           </a:solidFill>
           <a:ln/>
         </p:spPr>
+        <p:txBody>
+          <a:bodyPr/>
+          <a:p/>
+        </p:txBody>
       </p:sp>
       <p:pic>
         <p:nvPicPr>
@@ -10809,6 +10974,10 @@
             <a:tailEnd type="triangle"/>
           </a:ln>
         </p:spPr>
+        <p:txBody>
+          <a:bodyPr/>
+          <a:p/>
+        </p:txBody>
       </p:sp>
       <p:sp>
         <p:nvSpPr>
@@ -10873,6 +11042,10 @@
             <a:tailEnd type="triangle"/>
           </a:ln>
         </p:spPr>
+        <p:txBody>
+          <a:bodyPr/>
+          <a:p/>
+        </p:txBody>
       </p:sp>
       <p:sp>
         <p:nvSpPr>
@@ -10937,6 +11110,10 @@
             <a:tailEnd type="triangle"/>
           </a:ln>
         </p:spPr>
+        <p:txBody>
+          <a:bodyPr/>
+          <a:p/>
+        </p:txBody>
       </p:sp>
       <p:sp>
         <p:nvSpPr>
@@ -11001,6 +11178,10 @@
             <a:tailEnd type="triangle"/>
           </a:ln>
         </p:spPr>
+        <p:txBody>
+          <a:bodyPr/>
+          <a:p/>
+        </p:txBody>
       </p:sp>
       <p:sp>
         <p:nvSpPr>
@@ -11065,6 +11246,10 @@
             <a:tailEnd type="triangle"/>
           </a:ln>
         </p:spPr>
+        <p:txBody>
+          <a:bodyPr/>
+          <a:p/>
+        </p:txBody>
       </p:sp>
       <p:sp>
         <p:nvSpPr>
@@ -11262,6 +11447,10 @@
             <a:tailEnd type="triangle"/>
           </a:ln>
         </p:spPr>
+        <p:txBody>
+          <a:bodyPr/>
+          <a:p/>
+        </p:txBody>
       </p:sp>
       <p:sp>
         <p:nvSpPr>
@@ -11286,6 +11475,10 @@
             <a:tailEnd type="triangle"/>
           </a:ln>
         </p:spPr>
+        <p:txBody>
+          <a:bodyPr/>
+          <a:p/>
+        </p:txBody>
       </p:sp>
       <p:sp>
         <p:nvSpPr>
@@ -11310,6 +11503,10 @@
             <a:tailEnd type="triangle"/>
           </a:ln>
         </p:spPr>
+        <p:txBody>
+          <a:bodyPr/>
+          <a:p/>
+        </p:txBody>
       </p:sp>
       <p:sp>
         <p:nvSpPr>
@@ -11335,6 +11532,10 @@
             <a:tailEnd type="triangle"/>
           </a:ln>
         </p:spPr>
+        <p:txBody>
+          <a:bodyPr/>
+          <a:p/>
+        </p:txBody>
       </p:sp>
       <p:sp>
         <p:nvSpPr>
@@ -11394,6 +11595,10 @@
             <a:prstDash val="solid"/>
           </a:ln>
         </p:spPr>
+        <p:txBody>
+          <a:bodyPr/>
+          <a:p/>
+        </p:txBody>
       </p:sp>
       <p:sp>
         <p:nvSpPr>
@@ -11417,6 +11622,10 @@
             <a:prstDash val="solid"/>
           </a:ln>
         </p:spPr>
+        <p:txBody>
+          <a:bodyPr/>
+          <a:p/>
+        </p:txBody>
       </p:sp>
       <p:sp>
         <p:nvSpPr>
@@ -11441,6 +11650,10 @@
             <a:tailEnd type="triangle"/>
           </a:ln>
         </p:spPr>
+        <p:txBody>
+          <a:bodyPr/>
+          <a:p/>
+        </p:txBody>
       </p:sp>
       <p:sp>
         <p:nvSpPr>
@@ -11773,6 +11986,10 @@
             <a:tailEnd type="triangle"/>
           </a:ln>
         </p:spPr>
+        <p:txBody>
+          <a:bodyPr/>
+          <a:p/>
+        </p:txBody>
       </p:sp>
       <p:sp>
         <p:nvSpPr>
@@ -11797,6 +12014,10 @@
             <a:tailEnd type="triangle"/>
           </a:ln>
         </p:spPr>
+        <p:txBody>
+          <a:bodyPr/>
+          <a:p/>
+        </p:txBody>
       </p:sp>
       <p:sp>
         <p:nvSpPr>
@@ -11821,6 +12042,10 @@
             <a:tailEnd type="triangle"/>
           </a:ln>
         </p:spPr>
+        <p:txBody>
+          <a:bodyPr/>
+          <a:p/>
+        </p:txBody>
       </p:sp>
       <p:sp>
         <p:nvSpPr>
@@ -11881,6 +12106,10 @@
             <a:tailEnd type="triangle"/>
           </a:ln>
         </p:spPr>
+        <p:txBody>
+          <a:bodyPr/>
+          <a:p/>
+        </p:txBody>
       </p:sp>
       <p:sp>
         <p:nvSpPr>
@@ -11905,6 +12134,10 @@
             <a:tailEnd type="triangle"/>
           </a:ln>
         </p:spPr>
+        <p:txBody>
+          <a:bodyPr/>
+          <a:p/>
+        </p:txBody>
       </p:sp>
       <p:sp>
         <p:nvSpPr>
@@ -11930,6 +12163,10 @@
             <a:tailEnd type="triangle"/>
           </a:ln>
         </p:spPr>
+        <p:txBody>
+          <a:bodyPr/>
+          <a:p/>
+        </p:txBody>
       </p:sp>
       <p:sp>
         <p:nvSpPr>
@@ -11953,6 +12190,10 @@
             <a:prstDash val="solid"/>
           </a:ln>
         </p:spPr>
+        <p:txBody>
+          <a:bodyPr/>
+          <a:p/>
+        </p:txBody>
       </p:sp>
       <p:sp>
         <p:nvSpPr>
@@ -11976,6 +12217,10 @@
             <a:prstDash val="solid"/>
           </a:ln>
         </p:spPr>
+        <p:txBody>
+          <a:bodyPr/>
+          <a:p/>
+        </p:txBody>
       </p:sp>
       <p:sp>
         <p:nvSpPr>
@@ -12000,6 +12245,10 @@
             <a:tailEnd type="triangle"/>
           </a:ln>
         </p:spPr>
+        <p:txBody>
+          <a:bodyPr/>
+          <a:p/>
+        </p:txBody>
       </p:sp>
       <p:sp>
         <p:nvSpPr>
@@ -12023,6 +12272,10 @@
             <a:prstDash val="solid"/>
           </a:ln>
         </p:spPr>
+        <p:txBody>
+          <a:bodyPr/>
+          <a:p/>
+        </p:txBody>
       </p:sp>
       <p:sp>
         <p:nvSpPr>
@@ -12046,6 +12299,10 @@
             <a:prstDash val="solid"/>
           </a:ln>
         </p:spPr>
+        <p:txBody>
+          <a:bodyPr/>
+          <a:p/>
+        </p:txBody>
       </p:sp>
       <p:sp>
         <p:nvSpPr>
@@ -12070,6 +12327,10 @@
             <a:tailEnd type="triangle"/>
           </a:ln>
         </p:spPr>
+        <p:txBody>
+          <a:bodyPr/>
+          <a:p/>
+        </p:txBody>
       </p:sp>
       <p:sp>
         <p:nvSpPr>
@@ -12250,6 +12511,10 @@
             <a:tailEnd type="triangle"/>
           </a:ln>
         </p:spPr>
+        <p:txBody>
+          <a:bodyPr/>
+          <a:p/>
+        </p:txBody>
       </p:sp>
       <p:sp>
         <p:nvSpPr>
@@ -12310,6 +12575,10 @@
             <a:tailEnd type="triangle"/>
           </a:ln>
         </p:spPr>
+        <p:txBody>
+          <a:bodyPr/>
+          <a:p/>
+        </p:txBody>
       </p:sp>
       <p:sp>
         <p:nvSpPr>
@@ -12334,6 +12603,10 @@
             <a:tailEnd type="triangle"/>
           </a:ln>
         </p:spPr>
+        <p:txBody>
+          <a:bodyPr/>
+          <a:p/>
+        </p:txBody>
       </p:sp>
       <p:sp>
         <p:nvSpPr>
@@ -12358,6 +12631,10 @@
             <a:tailEnd type="triangle"/>
           </a:ln>
         </p:spPr>
+        <p:txBody>
+          <a:bodyPr/>
+          <a:p/>
+        </p:txBody>
       </p:sp>
       <p:sp>
         <p:nvSpPr>
@@ -12382,6 +12659,10 @@
             <a:tailEnd type="triangle"/>
           </a:ln>
         </p:spPr>
+        <p:txBody>
+          <a:bodyPr/>
+          <a:p/>
+        </p:txBody>
       </p:sp>
       <p:sp>
         <p:nvSpPr>
@@ -12406,6 +12687,10 @@
             <a:tailEnd type="triangle"/>
           </a:ln>
         </p:spPr>
+        <p:txBody>
+          <a:bodyPr/>
+          <a:p/>
+        </p:txBody>
       </p:sp>
       <p:sp>
         <p:nvSpPr>
@@ -12914,6 +13199,10 @@
           </a:solidFill>
           <a:ln/>
         </p:spPr>
+        <p:txBody>
+          <a:bodyPr/>
+          <a:p/>
+        </p:txBody>
       </p:sp>
       <p:pic>
         <p:nvPicPr>
@@ -13018,6 +13307,10 @@
             <a:tailEnd type="triangle"/>
           </a:ln>
         </p:spPr>
+        <p:txBody>
+          <a:bodyPr/>
+          <a:p/>
+        </p:txBody>
       </p:sp>
       <p:sp>
         <p:nvSpPr>
@@ -13072,6 +13365,10 @@
           </a:solidFill>
           <a:ln/>
         </p:spPr>
+        <p:txBody>
+          <a:bodyPr/>
+          <a:p/>
+        </p:txBody>
       </p:sp>
       <p:pic>
         <p:nvPicPr>
@@ -13176,6 +13473,10 @@
             <a:tailEnd type="triangle"/>
           </a:ln>
         </p:spPr>
+        <p:txBody>
+          <a:bodyPr/>
+          <a:p/>
+        </p:txBody>
       </p:sp>
       <p:sp>
         <p:nvSpPr>
@@ -13230,6 +13531,10 @@
           </a:solidFill>
           <a:ln/>
         </p:spPr>
+        <p:txBody>
+          <a:bodyPr/>
+          <a:p/>
+        </p:txBody>
       </p:sp>
       <p:pic>
         <p:nvPicPr>
@@ -13334,6 +13639,10 @@
             <a:tailEnd type="triangle"/>
           </a:ln>
         </p:spPr>
+        <p:txBody>
+          <a:bodyPr/>
+          <a:p/>
+        </p:txBody>
       </p:sp>
       <p:sp>
         <p:nvSpPr>
@@ -13388,6 +13697,10 @@
           </a:solidFill>
           <a:ln/>
         </p:spPr>
+        <p:txBody>
+          <a:bodyPr/>
+          <a:p/>
+        </p:txBody>
       </p:sp>
       <p:pic>
         <p:nvPicPr>
@@ -13492,6 +13805,10 @@
             <a:tailEnd type="triangle"/>
           </a:ln>
         </p:spPr>
+        <p:txBody>
+          <a:bodyPr/>
+          <a:p/>
+        </p:txBody>
       </p:sp>
       <p:sp>
         <p:nvSpPr>
@@ -13546,6 +13863,10 @@
           </a:solidFill>
           <a:ln/>
         </p:spPr>
+        <p:txBody>
+          <a:bodyPr/>
+          <a:p/>
+        </p:txBody>
       </p:sp>
       <p:pic>
         <p:nvPicPr>
@@ -13690,6 +14011,10 @@
             <a:tailEnd type="triangle"/>
           </a:ln>
         </p:spPr>
+        <p:txBody>
+          <a:bodyPr/>
+          <a:p/>
+        </p:txBody>
       </p:sp>
       <p:sp>
         <p:nvSpPr>
@@ -13714,6 +14039,10 @@
             <a:tailEnd type="triangle"/>
           </a:ln>
         </p:spPr>
+        <p:txBody>
+          <a:bodyPr/>
+          <a:p/>
+        </p:txBody>
       </p:sp>
       <p:sp>
         <p:nvSpPr>
@@ -13828,6 +14157,10 @@
             <a:tailEnd type="triangle"/>
           </a:ln>
         </p:spPr>
+        <p:txBody>
+          <a:bodyPr/>
+          <a:p/>
+        </p:txBody>
       </p:sp>
       <p:sp>
         <p:nvSpPr>
@@ -13942,6 +14275,10 @@
             <a:tailEnd type="triangle"/>
           </a:ln>
         </p:spPr>
+        <p:txBody>
+          <a:bodyPr/>
+          <a:p/>
+        </p:txBody>
       </p:sp>
       <p:sp>
         <p:nvSpPr>
@@ -14056,6 +14393,10 @@
             <a:tailEnd type="triangle"/>
           </a:ln>
         </p:spPr>
+        <p:txBody>
+          <a:bodyPr/>
+          <a:p/>
+        </p:txBody>
       </p:sp>
       <p:sp>
         <p:nvSpPr>
@@ -14170,6 +14511,10 @@
             <a:tailEnd type="triangle"/>
           </a:ln>
         </p:spPr>
+        <p:txBody>
+          <a:bodyPr/>
+          <a:p/>
+        </p:txBody>
       </p:sp>
       <p:sp>
         <p:nvSpPr>
@@ -14496,6 +14841,10 @@
           </a:solidFill>
           <a:ln/>
         </p:spPr>
+        <p:txBody>
+          <a:bodyPr/>
+          <a:p/>
+        </p:txBody>
       </p:sp>
       <p:pic>
         <p:nvPicPr>
@@ -14600,6 +14949,10 @@
             <a:tailEnd type="triangle"/>
           </a:ln>
         </p:spPr>
+        <p:txBody>
+          <a:bodyPr/>
+          <a:p/>
+        </p:txBody>
       </p:sp>
       <p:sp>
         <p:nvSpPr>
@@ -14654,6 +15007,10 @@
           </a:solidFill>
           <a:ln/>
         </p:spPr>
+        <p:txBody>
+          <a:bodyPr/>
+          <a:p/>
+        </p:txBody>
       </p:sp>
       <p:pic>
         <p:nvPicPr>
@@ -14758,6 +15115,10 @@
             <a:tailEnd type="triangle"/>
           </a:ln>
         </p:spPr>
+        <p:txBody>
+          <a:bodyPr/>
+          <a:p/>
+        </p:txBody>
       </p:sp>
       <p:sp>
         <p:nvSpPr>
@@ -14812,6 +15173,10 @@
           </a:solidFill>
           <a:ln/>
         </p:spPr>
+        <p:txBody>
+          <a:bodyPr/>
+          <a:p/>
+        </p:txBody>
       </p:sp>
       <p:pic>
         <p:nvPicPr>
@@ -14916,6 +15281,10 @@
             <a:tailEnd type="triangle"/>
           </a:ln>
         </p:spPr>
+        <p:txBody>
+          <a:bodyPr/>
+          <a:p/>
+        </p:txBody>
       </p:sp>
       <p:sp>
         <p:nvSpPr>
@@ -14970,6 +15339,10 @@
           </a:solidFill>
           <a:ln/>
         </p:spPr>
+        <p:txBody>
+          <a:bodyPr/>
+          <a:p/>
+        </p:txBody>
       </p:sp>
       <p:pic>
         <p:nvPicPr>
@@ -15116,6 +15489,10 @@
             <a:tailEnd type="triangle"/>
           </a:ln>
         </p:spPr>
+        <p:txBody>
+          <a:bodyPr/>
+          <a:p/>
+        </p:txBody>
       </p:sp>
       <p:sp>
         <p:nvSpPr>
@@ -15182,6 +15559,10 @@
             <a:tailEnd type="triangle"/>
           </a:ln>
         </p:spPr>
+        <p:txBody>
+          <a:bodyPr/>
+          <a:p/>
+        </p:txBody>
       </p:sp>
       <p:sp>
         <p:nvSpPr>
@@ -23139,6 +23520,10 @@
           </a:solidFill>
           <a:ln/>
         </p:spPr>
+        <p:txBody>
+          <a:bodyPr/>
+          <a:p/>
+        </p:txBody>
       </p:sp>
       <p:pic>
         <p:nvPicPr>
@@ -23187,6 +23572,10 @@
             <a:tailEnd type="triangle"/>
           </a:ln>
         </p:spPr>
+        <p:txBody>
+          <a:bodyPr/>
+          <a:p/>
+        </p:txBody>
       </p:sp>
       <p:sp>
         <p:nvSpPr>
@@ -23268,6 +23657,10 @@
           </a:solidFill>
           <a:ln/>
         </p:spPr>
+        <p:txBody>
+          <a:bodyPr/>
+          <a:p/>
+        </p:txBody>
       </p:sp>
       <p:pic>
         <p:nvPicPr>
@@ -23316,6 +23709,10 @@
             <a:tailEnd type="triangle"/>
           </a:ln>
         </p:spPr>
+        <p:txBody>
+          <a:bodyPr/>
+          <a:p/>
+        </p:txBody>
       </p:sp>
       <p:sp>
         <p:nvSpPr>
@@ -23397,6 +23794,10 @@
           </a:solidFill>
           <a:ln/>
         </p:spPr>
+        <p:txBody>
+          <a:bodyPr/>
+          <a:p/>
+        </p:txBody>
       </p:sp>
       <p:pic>
         <p:nvPicPr>
@@ -23608,6 +24009,10 @@
           </a:solidFill>
           <a:ln/>
         </p:spPr>
+        <p:txBody>
+          <a:bodyPr/>
+          <a:p/>
+        </p:txBody>
       </p:sp>
       <p:pic>
         <p:nvPicPr>
@@ -23656,6 +24061,10 @@
             <a:tailEnd type="triangle"/>
           </a:ln>
         </p:spPr>
+        <p:txBody>
+          <a:bodyPr/>
+          <a:p/>
+        </p:txBody>
       </p:sp>
       <p:sp>
         <p:nvSpPr>
@@ -23737,6 +24146,10 @@
           </a:solidFill>
           <a:ln/>
         </p:spPr>
+        <p:txBody>
+          <a:bodyPr/>
+          <a:p/>
+        </p:txBody>
       </p:sp>
       <p:pic>
         <p:nvPicPr>
@@ -23785,6 +24198,10 @@
             <a:tailEnd type="triangle"/>
           </a:ln>
         </p:spPr>
+        <p:txBody>
+          <a:bodyPr/>
+          <a:p/>
+        </p:txBody>
       </p:sp>
       <p:sp>
         <p:nvSpPr>
@@ -23866,6 +24283,10 @@
           </a:solidFill>
           <a:ln/>
         </p:spPr>
+        <p:txBody>
+          <a:bodyPr/>
+          <a:p/>
+        </p:txBody>
       </p:sp>
       <p:pic>
         <p:nvPicPr>
@@ -23914,6 +24335,10 @@
             <a:tailEnd type="triangle"/>
           </a:ln>
         </p:spPr>
+        <p:txBody>
+          <a:bodyPr/>
+          <a:p/>
+        </p:txBody>
       </p:sp>
       <p:sp>
         <p:nvSpPr>
@@ -23995,6 +24420,10 @@
           </a:solidFill>
           <a:ln/>
         </p:spPr>
+        <p:txBody>
+          <a:bodyPr/>
+          <a:p/>
+        </p:txBody>
       </p:sp>
       <p:pic>
         <p:nvPicPr>
@@ -24255,6 +24684,10 @@
           </a:solidFill>
           <a:ln/>
         </p:spPr>
+        <p:txBody>
+          <a:bodyPr/>
+          <a:p/>
+        </p:txBody>
       </p:sp>
       <p:pic>
         <p:nvPicPr>
@@ -24359,6 +24792,10 @@
             <a:tailEnd type="triangle"/>
           </a:ln>
         </p:spPr>
+        <p:txBody>
+          <a:bodyPr/>
+          <a:p/>
+        </p:txBody>
       </p:sp>
       <p:sp>
         <p:nvSpPr>
@@ -24413,6 +24850,10 @@
           </a:solidFill>
           <a:ln/>
         </p:spPr>
+        <p:txBody>
+          <a:bodyPr/>
+          <a:p/>
+        </p:txBody>
       </p:sp>
       <p:pic>
         <p:nvPicPr>
@@ -24517,6 +24958,10 @@
             <a:tailEnd type="triangle"/>
           </a:ln>
         </p:spPr>
+        <p:txBody>
+          <a:bodyPr/>
+          <a:p/>
+        </p:txBody>
       </p:sp>
       <p:sp>
         <p:nvSpPr>
@@ -24571,6 +25016,10 @@
           </a:solidFill>
           <a:ln/>
         </p:spPr>
+        <p:txBody>
+          <a:bodyPr/>
+          <a:p/>
+        </p:txBody>
       </p:sp>
       <p:pic>
         <p:nvPicPr>
@@ -24675,6 +25124,10 @@
             <a:tailEnd type="triangle"/>
           </a:ln>
         </p:spPr>
+        <p:txBody>
+          <a:bodyPr/>
+          <a:p/>
+        </p:txBody>
       </p:sp>
       <p:sp>
         <p:nvSpPr>
@@ -24729,6 +25182,10 @@
           </a:solidFill>
           <a:ln/>
         </p:spPr>
+        <p:txBody>
+          <a:bodyPr/>
+          <a:p/>
+        </p:txBody>
       </p:sp>
       <p:pic>
         <p:nvPicPr>
@@ -24833,6 +25290,10 @@
             <a:tailEnd type="triangle"/>
           </a:ln>
         </p:spPr>
+        <p:txBody>
+          <a:bodyPr/>
+          <a:p/>
+        </p:txBody>
       </p:sp>
       <p:sp>
         <p:nvSpPr>
@@ -24887,6 +25348,10 @@
           </a:solidFill>
           <a:ln/>
         </p:spPr>
+        <p:txBody>
+          <a:bodyPr/>
+          <a:p/>
+        </p:txBody>
       </p:sp>
       <p:pic>
         <p:nvPicPr>
@@ -24991,6 +25456,10 @@
             <a:tailEnd type="triangle"/>
           </a:ln>
         </p:spPr>
+        <p:txBody>
+          <a:bodyPr/>
+          <a:p/>
+        </p:txBody>
       </p:sp>
       <p:sp>
         <p:nvSpPr>
@@ -25071,6 +25540,10 @@
             <a:tailEnd type="triangle"/>
           </a:ln>
         </p:spPr>
+        <p:txBody>
+          <a:bodyPr/>
+          <a:p/>
+        </p:txBody>
       </p:sp>
       <p:sp>
         <p:nvSpPr>
@@ -25151,6 +25624,10 @@
             <a:tailEnd type="triangle"/>
           </a:ln>
         </p:spPr>
+        <p:txBody>
+          <a:bodyPr/>
+          <a:p/>
+        </p:txBody>
       </p:sp>
       <p:sp>
         <p:nvSpPr>
@@ -25261,6 +25738,10 @@
           </a:solidFill>
           <a:ln/>
         </p:spPr>
+        <p:txBody>
+          <a:bodyPr/>
+          <a:p/>
+        </p:txBody>
       </p:sp>
       <p:pic>
         <p:nvPicPr>
@@ -26748,6 +27229,10 @@
           </a:solidFill>
           <a:ln/>
         </p:spPr>
+        <p:txBody>
+          <a:bodyPr/>
+          <a:p/>
+        </p:txBody>
       </p:sp>
       <p:pic>
         <p:nvPicPr>
@@ -26864,6 +27349,10 @@
           </a:solidFill>
           <a:ln/>
         </p:spPr>
+        <p:txBody>
+          <a:bodyPr/>
+          <a:p/>
+        </p:txBody>
       </p:sp>
       <p:pic>
         <p:nvPicPr>
@@ -26980,6 +27469,10 @@
           </a:solidFill>
           <a:ln/>
         </p:spPr>
+        <p:txBody>
+          <a:bodyPr/>
+          <a:p/>
+        </p:txBody>
       </p:sp>
       <p:pic>
         <p:nvPicPr>
@@ -27096,6 +27589,10 @@
           </a:solidFill>
           <a:ln/>
         </p:spPr>
+        <p:txBody>
+          <a:bodyPr/>
+          <a:p/>
+        </p:txBody>
       </p:sp>
       <p:pic>
         <p:nvPicPr>
@@ -29140,6 +29637,10 @@
           </a:solidFill>
           <a:ln/>
         </p:spPr>
+        <p:txBody>
+          <a:bodyPr/>
+          <a:p/>
+        </p:txBody>
       </p:sp>
       <p:pic>
         <p:nvPicPr>
@@ -29220,6 +29721,10 @@
           </a:solidFill>
           <a:ln/>
         </p:spPr>
+        <p:txBody>
+          <a:bodyPr/>
+          <a:p/>
+        </p:txBody>
       </p:sp>
       <p:pic>
         <p:nvPicPr>
@@ -29300,6 +29805,10 @@
           </a:solidFill>
           <a:ln/>
         </p:spPr>
+        <p:txBody>
+          <a:bodyPr/>
+          <a:p/>
+        </p:txBody>
       </p:sp>
       <p:pic>
         <p:nvPicPr>
@@ -29380,6 +29889,10 @@
           </a:solidFill>
           <a:ln/>
         </p:spPr>
+        <p:txBody>
+          <a:bodyPr/>
+          <a:p/>
+        </p:txBody>
       </p:sp>
       <p:pic>
         <p:nvPicPr>
@@ -29824,6 +30337,10 @@
           </a:solidFill>
           <a:ln/>
         </p:spPr>
+        <p:txBody>
+          <a:bodyPr/>
+          <a:p/>
+        </p:txBody>
       </p:sp>
       <p:pic>
         <p:nvPicPr>
@@ -29990,6 +30507,10 @@
             <a:prstDash val="solid"/>
           </a:ln>
         </p:spPr>
+        <p:txBody>
+          <a:bodyPr/>
+          <a:p/>
+        </p:txBody>
       </p:sp>
       <p:sp>
         <p:nvSpPr>
@@ -30060,6 +30581,10 @@
             <a:prstDash val="solid"/>
           </a:ln>
         </p:spPr>
+        <p:txBody>
+          <a:bodyPr/>
+          <a:p/>
+        </p:txBody>
       </p:sp>
       <p:sp>
         <p:nvSpPr>
@@ -30130,6 +30655,10 @@
             <a:prstDash val="solid"/>
           </a:ln>
         </p:spPr>
+        <p:txBody>
+          <a:bodyPr/>
+          <a:p/>
+        </p:txBody>
       </p:sp>
       <p:sp>
         <p:nvSpPr>
@@ -30231,6 +30760,10 @@
           </a:solidFill>
           <a:ln/>
         </p:spPr>
+        <p:txBody>
+          <a:bodyPr/>
+          <a:p/>
+        </p:txBody>
       </p:sp>
       <p:pic>
         <p:nvPicPr>
@@ -30397,6 +30930,10 @@
             <a:prstDash val="solid"/>
           </a:ln>
         </p:spPr>
+        <p:txBody>
+          <a:bodyPr/>
+          <a:p/>
+        </p:txBody>
       </p:sp>
       <p:sp>
         <p:nvSpPr>
@@ -30467,6 +31004,10 @@
             <a:prstDash val="solid"/>
           </a:ln>
         </p:spPr>
+        <p:txBody>
+          <a:bodyPr/>
+          <a:p/>
+        </p:txBody>
       </p:sp>
       <p:sp>
         <p:nvSpPr>
@@ -30537,6 +31078,10 @@
             <a:prstDash val="solid"/>
           </a:ln>
         </p:spPr>
+        <p:txBody>
+          <a:bodyPr/>
+          <a:p/>
+        </p:txBody>
       </p:sp>
       <p:sp>
         <p:nvSpPr>
@@ -30638,6 +31183,10 @@
           </a:solidFill>
           <a:ln/>
         </p:spPr>
+        <p:txBody>
+          <a:bodyPr/>
+          <a:p/>
+        </p:txBody>
       </p:sp>
       <p:pic>
         <p:nvPicPr>
@@ -30804,6 +31353,10 @@
             <a:prstDash val="solid"/>
           </a:ln>
         </p:spPr>
+        <p:txBody>
+          <a:bodyPr/>
+          <a:p/>
+        </p:txBody>
       </p:sp>
       <p:sp>
         <p:nvSpPr>
@@ -30874,6 +31427,10 @@
             <a:prstDash val="solid"/>
           </a:ln>
         </p:spPr>
+        <p:txBody>
+          <a:bodyPr/>
+          <a:p/>
+        </p:txBody>
       </p:sp>
       <p:sp>
         <p:nvSpPr>
@@ -30944,6 +31501,10 @@
             <a:prstDash val="solid"/>
           </a:ln>
         </p:spPr>
+        <p:txBody>
+          <a:bodyPr/>
+          <a:p/>
+        </p:txBody>
       </p:sp>
       <p:sp>
         <p:nvSpPr>
@@ -31493,6 +32054,10 @@
             <a:tailEnd type="triangle"/>
           </a:ln>
         </p:spPr>
+        <p:txBody>
+          <a:bodyPr/>
+          <a:p/>
+        </p:txBody>
       </p:sp>
       <p:sp>
         <p:nvSpPr>
@@ -31923,6 +32488,10 @@
             <a:tailEnd type="triangle"/>
           </a:ln>
         </p:spPr>
+        <p:txBody>
+          <a:bodyPr/>
+          <a:p/>
+        </p:txBody>
       </p:sp>
       <p:sp>
         <p:nvSpPr>
@@ -32209,6 +32778,10 @@
             <a:tailEnd type="triangle"/>
           </a:ln>
         </p:spPr>
+        <p:txBody>
+          <a:bodyPr/>
+          <a:p/>
+        </p:txBody>
       </p:sp>
       <p:sp>
         <p:nvSpPr>
@@ -32273,6 +32846,10 @@
             <a:tailEnd type="triangle"/>
           </a:ln>
         </p:spPr>
+        <p:txBody>
+          <a:bodyPr/>
+          <a:p/>
+        </p:txBody>
       </p:sp>
       <p:sp>
         <p:nvSpPr>
@@ -32297,6 +32874,10 @@
             <a:tailEnd type="triangle"/>
           </a:ln>
         </p:spPr>
+        <p:txBody>
+          <a:bodyPr/>
+          <a:p/>
+        </p:txBody>
       </p:sp>
       <p:sp>
         <p:nvSpPr>
@@ -32719,6 +33300,10 @@
           </a:solidFill>
           <a:ln/>
         </p:spPr>
+        <p:txBody>
+          <a:bodyPr/>
+          <a:p/>
+        </p:txBody>
       </p:sp>
       <p:pic>
         <p:nvPicPr>
@@ -32767,6 +33352,10 @@
             <a:tailEnd type="triangle"/>
           </a:ln>
         </p:spPr>
+        <p:txBody>
+          <a:bodyPr/>
+          <a:p/>
+        </p:txBody>
       </p:sp>
       <p:sp>
         <p:nvSpPr>
@@ -32877,6 +33466,10 @@
           </a:solidFill>
           <a:ln/>
         </p:spPr>
+        <p:txBody>
+          <a:bodyPr/>
+          <a:p/>
+        </p:txBody>
       </p:sp>
       <p:pic>
         <p:nvPicPr>
@@ -32925,6 +33518,10 @@
             <a:tailEnd type="triangle"/>
           </a:ln>
         </p:spPr>
+        <p:txBody>
+          <a:bodyPr/>
+          <a:p/>
+        </p:txBody>
       </p:sp>
       <p:sp>
         <p:nvSpPr>
@@ -33035,6 +33632,10 @@
           </a:solidFill>
           <a:ln/>
         </p:spPr>
+        <p:txBody>
+          <a:bodyPr/>
+          <a:p/>
+        </p:txBody>
       </p:sp>
       <p:pic>
         <p:nvPicPr>
@@ -33333,6 +33934,10 @@
           </a:solidFill>
           <a:ln/>
         </p:spPr>
+        <p:txBody>
+          <a:bodyPr/>
+          <a:p/>
+        </p:txBody>
       </p:sp>
       <p:pic>
         <p:nvPicPr>
@@ -33427,6 +34032,10 @@
           </a:solidFill>
           <a:ln/>
         </p:spPr>
+        <p:txBody>
+          <a:bodyPr/>
+          <a:p/>
+        </p:txBody>
       </p:sp>
       <p:pic>
         <p:nvPicPr>
@@ -33521,6 +34130,10 @@
           </a:solidFill>
           <a:ln/>
         </p:spPr>
+        <p:txBody>
+          <a:bodyPr/>
+          <a:p/>
+        </p:txBody>
       </p:sp>
       <p:pic>
         <p:nvPicPr>
@@ -33615,6 +34228,10 @@
           </a:solidFill>
           <a:ln/>
         </p:spPr>
+        <p:txBody>
+          <a:bodyPr/>
+          <a:p/>
+        </p:txBody>
       </p:sp>
       <p:pic>
         <p:nvPicPr>
@@ -33709,6 +34326,10 @@
           </a:solidFill>
           <a:ln/>
         </p:spPr>
+        <p:txBody>
+          <a:bodyPr/>
+          <a:p/>
+        </p:txBody>
       </p:sp>
       <p:pic>
         <p:nvPicPr>
@@ -33803,6 +34424,10 @@
           </a:solidFill>
           <a:ln/>
         </p:spPr>
+        <p:txBody>
+          <a:bodyPr/>
+          <a:p/>
+        </p:txBody>
       </p:sp>
       <p:pic>
         <p:nvPicPr>
@@ -33897,6 +34522,10 @@
           </a:solidFill>
           <a:ln/>
         </p:spPr>
+        <p:txBody>
+          <a:bodyPr/>
+          <a:p/>
+        </p:txBody>
       </p:sp>
       <p:pic>
         <p:nvPicPr>
@@ -33991,6 +34620,10 @@
           </a:solidFill>
           <a:ln/>
         </p:spPr>
+        <p:txBody>
+          <a:bodyPr/>
+          <a:p/>
+        </p:txBody>
       </p:sp>
       <p:pic>
         <p:nvPicPr>
@@ -34085,6 +34718,10 @@
           </a:solidFill>
           <a:ln/>
         </p:spPr>
+        <p:txBody>
+          <a:bodyPr/>
+          <a:p/>
+        </p:txBody>
       </p:sp>
       <p:pic>
         <p:nvPicPr>
@@ -34179,6 +34816,10 @@
           </a:solidFill>
           <a:ln/>
         </p:spPr>
+        <p:txBody>
+          <a:bodyPr/>
+          <a:p/>
+        </p:txBody>
       </p:sp>
       <p:pic>
         <p:nvPicPr>
@@ -34273,6 +34914,10 @@
           </a:solidFill>
           <a:ln/>
         </p:spPr>
+        <p:txBody>
+          <a:bodyPr/>
+          <a:p/>
+        </p:txBody>
       </p:sp>
       <p:pic>
         <p:nvPicPr>
@@ -34761,6 +35406,10 @@
           </a:solidFill>
           <a:ln/>
         </p:spPr>
+        <p:txBody>
+          <a:bodyPr/>
+          <a:p/>
+        </p:txBody>
       </p:sp>
       <p:pic>
         <p:nvPicPr>
@@ -34852,6 +35501,10 @@
           </a:solidFill>
           <a:ln/>
         </p:spPr>
+        <p:txBody>
+          <a:bodyPr/>
+          <a:p/>
+        </p:txBody>
       </p:sp>
       <p:pic>
         <p:nvPicPr>
@@ -34943,6 +35596,10 @@
           </a:solidFill>
           <a:ln/>
         </p:spPr>
+        <p:txBody>
+          <a:bodyPr/>
+          <a:p/>
+        </p:txBody>
       </p:sp>
       <p:pic>
         <p:nvPicPr>
@@ -35034,6 +35691,10 @@
           </a:solidFill>
           <a:ln/>
         </p:spPr>
+        <p:txBody>
+          <a:bodyPr/>
+          <a:p/>
+        </p:txBody>
       </p:sp>
       <p:pic>
         <p:nvPicPr>
@@ -35125,6 +35786,10 @@
           </a:solidFill>
           <a:ln/>
         </p:spPr>
+        <p:txBody>
+          <a:bodyPr/>
+          <a:p/>
+        </p:txBody>
       </p:sp>
       <p:pic>
         <p:nvPicPr>
@@ -35216,6 +35881,10 @@
           </a:solidFill>
           <a:ln/>
         </p:spPr>
+        <p:txBody>
+          <a:bodyPr/>
+          <a:p/>
+        </p:txBody>
       </p:sp>
       <p:pic>
         <p:nvPicPr>
@@ -35307,6 +35976,10 @@
           </a:solidFill>
           <a:ln/>
         </p:spPr>
+        <p:txBody>
+          <a:bodyPr/>
+          <a:p/>
+        </p:txBody>
       </p:sp>
       <p:pic>
         <p:nvPicPr>
@@ -35398,6 +36071,10 @@
           </a:solidFill>
           <a:ln/>
         </p:spPr>
+        <p:txBody>
+          <a:bodyPr/>
+          <a:p/>
+        </p:txBody>
       </p:sp>
       <p:pic>
         <p:nvPicPr>
@@ -35489,6 +36166,10 @@
           </a:solidFill>
           <a:ln/>
         </p:spPr>
+        <p:txBody>
+          <a:bodyPr/>
+          <a:p/>
+        </p:txBody>
       </p:sp>
       <p:pic>
         <p:nvPicPr>
@@ -37524,6 +38205,10 @@
             <a:tailEnd type="triangle"/>
           </a:ln>
         </p:spPr>
+        <p:txBody>
+          <a:bodyPr/>
+          <a:p/>
+        </p:txBody>
       </p:sp>
       <p:sp>
         <p:nvSpPr>
@@ -38289,6 +38974,10 @@
           </a:solidFill>
           <a:ln/>
         </p:spPr>
+        <p:txBody>
+          <a:bodyPr/>
+          <a:p/>
+        </p:txBody>
       </p:sp>
       <p:pic>
         <p:nvPicPr>
@@ -38369,6 +39058,10 @@
           </a:solidFill>
           <a:ln/>
         </p:spPr>
+        <p:txBody>
+          <a:bodyPr/>
+          <a:p/>
+        </p:txBody>
       </p:sp>
       <p:pic>
         <p:nvPicPr>
@@ -38449,6 +39142,10 @@
           </a:solidFill>
           <a:ln/>
         </p:spPr>
+        <p:txBody>
+          <a:bodyPr/>
+          <a:p/>
+        </p:txBody>
       </p:sp>
       <p:pic>
         <p:nvPicPr>
@@ -38675,6 +39372,10 @@
           </a:solidFill>
           <a:ln/>
         </p:spPr>
+        <p:txBody>
+          <a:bodyPr/>
+          <a:p/>
+        </p:txBody>
       </p:sp>
       <p:pic>
         <p:nvPicPr>
@@ -38755,6 +39456,10 @@
           </a:solidFill>
           <a:ln/>
         </p:spPr>
+        <p:txBody>
+          <a:bodyPr/>
+          <a:p/>
+        </p:txBody>
       </p:sp>
       <p:pic>
         <p:nvPicPr>
@@ -38835,6 +39540,10 @@
           </a:solidFill>
           <a:ln/>
         </p:spPr>
+        <p:txBody>
+          <a:bodyPr/>
+          <a:p/>
+        </p:txBody>
       </p:sp>
       <p:pic>
         <p:nvPicPr>
@@ -38915,6 +39624,10 @@
           </a:solidFill>
           <a:ln/>
         </p:spPr>
+        <p:txBody>
+          <a:bodyPr/>
+          <a:p/>
+        </p:txBody>
       </p:sp>
       <p:pic>
         <p:nvPicPr>
@@ -39167,6 +39880,10 @@
             <a:tailEnd type="triangle"/>
           </a:ln>
         </p:spPr>
+        <p:txBody>
+          <a:bodyPr/>
+          <a:p/>
+        </p:txBody>
       </p:sp>
       <p:sp>
         <p:nvSpPr>
@@ -39191,6 +39908,10 @@
             <a:tailEnd type="triangle"/>
           </a:ln>
         </p:spPr>
+        <p:txBody>
+          <a:bodyPr/>
+          <a:p/>
+        </p:txBody>
       </p:sp>
       <p:sp>
         <p:nvSpPr>
@@ -39215,6 +39936,10 @@
             <a:tailEnd type="triangle"/>
           </a:ln>
         </p:spPr>
+        <p:txBody>
+          <a:bodyPr/>
+          <a:p/>
+        </p:txBody>
       </p:sp>
       <p:sp>
         <p:nvSpPr>
@@ -39239,6 +39964,10 @@
             <a:tailEnd type="triangle"/>
           </a:ln>
         </p:spPr>
+        <p:txBody>
+          <a:bodyPr/>
+          <a:p/>
+        </p:txBody>
       </p:sp>
       <p:sp>
         <p:nvSpPr>
@@ -39317,6 +40046,10 @@
             <a:tailEnd type="triangle"/>
           </a:ln>
         </p:spPr>
+        <p:txBody>
+          <a:bodyPr/>
+          <a:p/>
+        </p:txBody>
       </p:sp>
       <p:sp>
         <p:nvSpPr>
@@ -39341,6 +40074,10 @@
             <a:tailEnd type="triangle"/>
           </a:ln>
         </p:spPr>
+        <p:txBody>
+          <a:bodyPr/>
+          <a:p/>
+        </p:txBody>
       </p:sp>
       <p:sp>
         <p:nvSpPr>
@@ -39365,6 +40102,10 @@
             <a:tailEnd type="triangle"/>
           </a:ln>
         </p:spPr>
+        <p:txBody>
+          <a:bodyPr/>
+          <a:p/>
+        </p:txBody>
       </p:sp>
       <p:sp>
         <p:nvSpPr>
@@ -39525,6 +40266,10 @@
             <a:tailEnd type="triangle"/>
           </a:ln>
         </p:spPr>
+        <p:txBody>
+          <a:bodyPr/>
+          <a:p/>
+        </p:txBody>
       </p:sp>
       <p:sp>
         <p:nvSpPr>
@@ -39550,6 +40295,10 @@
             <a:tailEnd type="triangle"/>
           </a:ln>
         </p:spPr>
+        <p:txBody>
+          <a:bodyPr/>
+          <a:p/>
+        </p:txBody>
       </p:sp>
       <p:sp>
         <p:nvSpPr>
@@ -39574,6 +40323,10 @@
             <a:tailEnd type="triangle"/>
           </a:ln>
         </p:spPr>
+        <p:txBody>
+          <a:bodyPr/>
+          <a:p/>
+        </p:txBody>
       </p:sp>
       <p:sp>
         <p:nvSpPr>
@@ -40410,6 +41163,10 @@
             <a:tailEnd type="triangle"/>
           </a:ln>
         </p:spPr>
+        <p:txBody>
+          <a:bodyPr/>
+          <a:p/>
+        </p:txBody>
       </p:sp>
       <p:sp>
         <p:nvSpPr>
@@ -40490,6 +41247,10 @@
             <a:tailEnd type="triangle"/>
           </a:ln>
         </p:spPr>
+        <p:txBody>
+          <a:bodyPr/>
+          <a:p/>
+        </p:txBody>
       </p:sp>
       <p:sp>
         <p:nvSpPr>
@@ -40624,6 +41385,10 @@
             <a:tailEnd type="triangle"/>
           </a:ln>
         </p:spPr>
+        <p:txBody>
+          <a:bodyPr/>
+          <a:p/>
+        </p:txBody>
       </p:sp>
       <p:sp>
         <p:nvSpPr>
@@ -40704,6 +41469,10 @@
             <a:tailEnd type="triangle"/>
           </a:ln>
         </p:spPr>
+        <p:txBody>
+          <a:bodyPr/>
+          <a:p/>
+        </p:txBody>
       </p:sp>
       <p:sp>
         <p:nvSpPr>
@@ -41536,6 +42305,10 @@
           </a:solidFill>
           <a:ln/>
         </p:spPr>
+        <p:txBody>
+          <a:bodyPr/>
+          <a:p/>
+        </p:txBody>
       </p:sp>
       <p:pic>
         <p:nvPicPr>
@@ -41640,6 +42413,10 @@
             <a:tailEnd type="triangle"/>
           </a:ln>
         </p:spPr>
+        <p:txBody>
+          <a:bodyPr/>
+          <a:p/>
+        </p:txBody>
       </p:sp>
       <p:sp>
         <p:nvSpPr>
@@ -41694,6 +42471,10 @@
           </a:solidFill>
           <a:ln/>
         </p:spPr>
+        <p:txBody>
+          <a:bodyPr/>
+          <a:p/>
+        </p:txBody>
       </p:sp>
       <p:pic>
         <p:nvPicPr>
@@ -41798,6 +42579,10 @@
             <a:tailEnd type="triangle"/>
           </a:ln>
         </p:spPr>
+        <p:txBody>
+          <a:bodyPr/>
+          <a:p/>
+        </p:txBody>
       </p:sp>
       <p:sp>
         <p:nvSpPr>
@@ -41852,6 +42637,10 @@
           </a:solidFill>
           <a:ln/>
         </p:spPr>
+        <p:txBody>
+          <a:bodyPr/>
+          <a:p/>
+        </p:txBody>
       </p:sp>
       <p:pic>
         <p:nvPicPr>
@@ -41956,6 +42745,10 @@
             <a:tailEnd type="triangle"/>
           </a:ln>
         </p:spPr>
+        <p:txBody>
+          <a:bodyPr/>
+          <a:p/>
+        </p:txBody>
       </p:sp>
       <p:sp>
         <p:nvSpPr>
@@ -42010,6 +42803,10 @@
           </a:solidFill>
           <a:ln/>
         </p:spPr>
+        <p:txBody>
+          <a:bodyPr/>
+          <a:p/>
+        </p:txBody>
       </p:sp>
       <p:pic>
         <p:nvPicPr>
@@ -42114,6 +42911,10 @@
             <a:tailEnd type="triangle"/>
           </a:ln>
         </p:spPr>
+        <p:txBody>
+          <a:bodyPr/>
+          <a:p/>
+        </p:txBody>
       </p:sp>
       <p:sp>
         <p:nvSpPr>
@@ -42228,6 +43029,10 @@
             <a:tailEnd type="triangle"/>
           </a:ln>
         </p:spPr>
+        <p:txBody>
+          <a:bodyPr/>
+          <a:p/>
+        </p:txBody>
       </p:sp>
       <p:sp>
         <p:nvSpPr>
@@ -42342,6 +43147,10 @@
             <a:tailEnd type="triangle"/>
           </a:ln>
         </p:spPr>
+        <p:txBody>
+          <a:bodyPr/>
+          <a:p/>
+        </p:txBody>
       </p:sp>
       <p:sp>
         <p:nvSpPr>
@@ -42668,6 +43477,10 @@
           </a:solidFill>
           <a:ln/>
         </p:spPr>
+        <p:txBody>
+          <a:bodyPr/>
+          <a:p/>
+        </p:txBody>
       </p:sp>
       <p:pic>
         <p:nvPicPr>
@@ -42772,6 +43585,10 @@
             <a:tailEnd type="triangle"/>
           </a:ln>
         </p:spPr>
+        <p:txBody>
+          <a:bodyPr/>
+          <a:p/>
+        </p:txBody>
       </p:sp>
       <p:sp>
         <p:nvSpPr>
@@ -42826,6 +43643,10 @@
           </a:solidFill>
           <a:ln/>
         </p:spPr>
+        <p:txBody>
+          <a:bodyPr/>
+          <a:p/>
+        </p:txBody>
       </p:sp>
       <p:pic>
         <p:nvPicPr>
@@ -42930,6 +43751,10 @@
             <a:tailEnd type="triangle"/>
           </a:ln>
         </p:spPr>
+        <p:txBody>
+          <a:bodyPr/>
+          <a:p/>
+        </p:txBody>
       </p:sp>
       <p:sp>
         <p:nvSpPr>
@@ -42984,6 +43809,10 @@
           </a:solidFill>
           <a:ln/>
         </p:spPr>
+        <p:txBody>
+          <a:bodyPr/>
+          <a:p/>
+        </p:txBody>
       </p:sp>
       <p:pic>
         <p:nvPicPr>
@@ -43088,6 +43917,10 @@
             <a:tailEnd type="triangle"/>
           </a:ln>
         </p:spPr>
+        <p:txBody>
+          <a:bodyPr/>
+          <a:p/>
+        </p:txBody>
       </p:sp>
       <p:sp>
         <p:nvSpPr>
@@ -43142,6 +43975,10 @@
           </a:solidFill>
           <a:ln/>
         </p:spPr>
+        <p:txBody>
+          <a:bodyPr/>
+          <a:p/>
+        </p:txBody>
       </p:sp>
       <p:pic>
         <p:nvPicPr>
@@ -43246,6 +44083,10 @@
             <a:tailEnd type="triangle"/>
           </a:ln>
         </p:spPr>
+        <p:txBody>
+          <a:bodyPr/>
+          <a:p/>
+        </p:txBody>
       </p:sp>
       <p:sp>
         <p:nvSpPr>
@@ -43300,6 +44141,10 @@
           </a:solidFill>
           <a:ln/>
         </p:spPr>
+        <p:txBody>
+          <a:bodyPr/>
+          <a:p/>
+        </p:txBody>
       </p:sp>
       <p:pic>
         <p:nvPicPr>
@@ -43403,6 +44248,10 @@
             <a:prstDash val="dash"/>
           </a:ln>
         </p:spPr>
+        <p:txBody>
+          <a:bodyPr/>
+          <a:p/>
+        </p:txBody>
       </p:sp>
       <p:sp>
         <p:nvSpPr>
@@ -43427,6 +44276,10 @@
             <a:tailEnd type="triangle"/>
           </a:ln>
         </p:spPr>
+        <p:txBody>
+          <a:bodyPr/>
+          <a:p/>
+        </p:txBody>
       </p:sp>
       <p:sp>
         <p:nvSpPr>
@@ -43905,6 +44758,10 @@
             <a:tailEnd type="triangle"/>
           </a:ln>
         </p:spPr>
+        <p:txBody>
+          <a:bodyPr/>
+          <a:p/>
+        </p:txBody>
       </p:sp>
       <p:sp>
         <p:nvSpPr>
@@ -43929,6 +44786,10 @@
             <a:tailEnd type="triangle"/>
           </a:ln>
         </p:spPr>
+        <p:txBody>
+          <a:bodyPr/>
+          <a:p/>
+        </p:txBody>
       </p:sp>
       <p:sp>
         <p:nvSpPr>
@@ -44009,6 +44870,10 @@
             <a:tailEnd type="triangle"/>
           </a:ln>
         </p:spPr>
+        <p:txBody>
+          <a:bodyPr/>
+          <a:p/>
+        </p:txBody>
       </p:sp>
       <p:sp>
         <p:nvSpPr>
@@ -44089,6 +44954,10 @@
             <a:tailEnd type="triangle"/>
           </a:ln>
         </p:spPr>
+        <p:txBody>
+          <a:bodyPr/>
+          <a:p/>
+        </p:txBody>
       </p:sp>
       <p:sp>
         <p:nvSpPr>
@@ -44169,6 +45038,10 @@
             <a:tailEnd type="triangle"/>
           </a:ln>
         </p:spPr>
+        <p:txBody>
+          <a:bodyPr/>
+          <a:p/>
+        </p:txBody>
       </p:sp>
       <p:sp>
         <p:nvSpPr>
@@ -44249,6 +45122,10 @@
             <a:tailEnd type="triangle"/>
           </a:ln>
         </p:spPr>
+        <p:txBody>
+          <a:bodyPr/>
+          <a:p/>
+        </p:txBody>
       </p:sp>
       <p:sp>
         <p:nvSpPr>
@@ -44891,6 +45768,10 @@
             <a:tailEnd type="triangle"/>
           </a:ln>
         </p:spPr>
+        <p:txBody>
+          <a:bodyPr/>
+          <a:p/>
+        </p:txBody>
       </p:sp>
       <p:sp>
         <p:nvSpPr>
@@ -44957,6 +45838,10 @@
             <a:tailEnd type="triangle"/>
           </a:ln>
         </p:spPr>
+        <p:txBody>
+          <a:bodyPr/>
+          <a:p/>
+        </p:txBody>
       </p:sp>
       <p:sp>
         <p:nvSpPr>
@@ -45021,6 +45906,10 @@
             <a:tailEnd type="triangle"/>
           </a:ln>
         </p:spPr>
+        <p:txBody>
+          <a:bodyPr/>
+          <a:p/>
+        </p:txBody>
       </p:sp>
       <p:sp>
         <p:nvSpPr>
@@ -45125,6 +46014,10 @@
             <a:tailEnd type="triangle"/>
           </a:ln>
         </p:spPr>
+        <p:txBody>
+          <a:bodyPr/>
+          <a:p/>
+        </p:txBody>
       </p:sp>
       <p:sp>
         <p:nvSpPr>
@@ -45191,6 +46084,10 @@
             <a:tailEnd type="triangle"/>
           </a:ln>
         </p:spPr>
+        <p:txBody>
+          <a:bodyPr/>
+          <a:p/>
+        </p:txBody>
       </p:sp>
       <p:sp>
         <p:nvSpPr>
@@ -45255,6 +46152,10 @@
             <a:tailEnd type="triangle"/>
           </a:ln>
         </p:spPr>
+        <p:txBody>
+          <a:bodyPr/>
+          <a:p/>
+        </p:txBody>
       </p:sp>
       <p:sp>
         <p:nvSpPr>
@@ -45359,6 +46260,10 @@
             <a:tailEnd type="triangle"/>
           </a:ln>
         </p:spPr>
+        <p:txBody>
+          <a:bodyPr/>
+          <a:p/>
+        </p:txBody>
       </p:sp>
       <p:sp>
         <p:nvSpPr>
@@ -45425,6 +46330,10 @@
             <a:tailEnd type="triangle"/>
           </a:ln>
         </p:spPr>
+        <p:txBody>
+          <a:bodyPr/>
+          <a:p/>
+        </p:txBody>
       </p:sp>
       <p:sp>
         <p:nvSpPr>
@@ -45521,6 +46430,10 @@
           </a:solidFill>
           <a:ln/>
         </p:spPr>
+        <p:txBody>
+          <a:bodyPr/>
+          <a:p/>
+        </p:txBody>
       </p:sp>
       <p:pic>
         <p:nvPicPr>
@@ -45615,6 +46528,10 @@
           </a:solidFill>
           <a:ln/>
         </p:spPr>
+        <p:txBody>
+          <a:bodyPr/>
+          <a:p/>
+        </p:txBody>
       </p:sp>
       <p:pic>
         <p:nvPicPr>
@@ -45709,6 +46626,10 @@
           </a:solidFill>
           <a:ln/>
         </p:spPr>
+        <p:txBody>
+          <a:bodyPr/>
+          <a:p/>
+        </p:txBody>
       </p:sp>
       <p:pic>
         <p:nvPicPr>
@@ -45803,6 +46724,10 @@
           </a:solidFill>
           <a:ln/>
         </p:spPr>
+        <p:txBody>
+          <a:bodyPr/>
+          <a:p/>
+        </p:txBody>
       </p:sp>
       <p:pic>
         <p:nvPicPr>
@@ -46304,6 +47229,10 @@
             <a:tailEnd type="triangle"/>
           </a:ln>
         </p:spPr>
+        <p:txBody>
+          <a:bodyPr/>
+          <a:p/>
+        </p:txBody>
       </p:sp>
       <p:sp>
         <p:nvSpPr>
@@ -46329,6 +47258,10 @@
             <a:tailEnd type="triangle"/>
           </a:ln>
         </p:spPr>
+        <p:txBody>
+          <a:bodyPr/>
+          <a:p/>
+        </p:txBody>
       </p:sp>
       <p:sp>
         <p:nvSpPr>
@@ -46408,6 +47341,10 @@
             <a:tailEnd type="triangle"/>
           </a:ln>
         </p:spPr>
+        <p:txBody>
+          <a:bodyPr/>
+          <a:p/>
+        </p:txBody>
       </p:sp>
       <p:sp>
         <p:nvSpPr>
@@ -46432,6 +47369,10 @@
             <a:tailEnd type="triangle"/>
           </a:ln>
         </p:spPr>
+        <p:txBody>
+          <a:bodyPr/>
+          <a:p/>
+        </p:txBody>
       </p:sp>
       <p:sp>
         <p:nvSpPr>
@@ -46577,6 +47518,10 @@
           </a:solidFill>
           <a:ln/>
         </p:spPr>
+        <p:txBody>
+          <a:bodyPr/>
+          <a:p/>
+        </p:txBody>
       </p:sp>
       <p:pic>
         <p:nvPicPr>
@@ -46671,6 +47616,10 @@
           </a:solidFill>
           <a:ln/>
         </p:spPr>
+        <p:txBody>
+          <a:bodyPr/>
+          <a:p/>
+        </p:txBody>
       </p:sp>
       <p:pic>
         <p:nvPicPr>
@@ -47311,6 +48260,10 @@
           </a:solidFill>
           <a:ln/>
         </p:spPr>
+        <p:txBody>
+          <a:bodyPr/>
+          <a:p/>
+        </p:txBody>
       </p:sp>
       <p:pic>
         <p:nvPicPr>
@@ -47391,6 +48344,10 @@
           </a:solidFill>
           <a:ln/>
         </p:spPr>
+        <p:txBody>
+          <a:bodyPr/>
+          <a:p/>
+        </p:txBody>
       </p:sp>
       <p:pic>
         <p:nvPicPr>
@@ -47471,6 +48428,10 @@
           </a:solidFill>
           <a:ln/>
         </p:spPr>
+        <p:txBody>
+          <a:bodyPr/>
+          <a:p/>
+        </p:txBody>
       </p:sp>
       <p:pic>
         <p:nvPicPr>
@@ -47915,6 +48876,10 @@
           </a:solidFill>
           <a:ln/>
         </p:spPr>
+        <p:txBody>
+          <a:bodyPr/>
+          <a:p/>
+        </p:txBody>
       </p:sp>
       <p:pic>
         <p:nvPicPr>
@@ -48076,6 +49041,10 @@
           </a:solidFill>
           <a:ln/>
         </p:spPr>
+        <p:txBody>
+          <a:bodyPr/>
+          <a:p/>
+        </p:txBody>
       </p:sp>
       <p:pic>
         <p:nvPicPr>
@@ -48237,6 +49206,10 @@
           </a:solidFill>
           <a:ln/>
         </p:spPr>
+        <p:txBody>
+          <a:bodyPr/>
+          <a:p/>
+        </p:txBody>
       </p:sp>
       <p:pic>
         <p:nvPicPr>
@@ -50066,6 +51039,10 @@
           </a:solidFill>
           <a:ln/>
         </p:spPr>
+        <p:txBody>
+          <a:bodyPr/>
+          <a:p/>
+        </p:txBody>
       </p:sp>
       <p:pic>
         <p:nvPicPr>
@@ -50200,6 +51177,10 @@
           </a:solidFill>
           <a:ln/>
         </p:spPr>
+        <p:txBody>
+          <a:bodyPr/>
+          <a:p/>
+        </p:txBody>
       </p:sp>
       <p:pic>
         <p:nvPicPr>
@@ -50334,6 +51315,10 @@
           </a:solidFill>
           <a:ln/>
         </p:spPr>
+        <p:txBody>
+          <a:bodyPr/>
+          <a:p/>
+        </p:txBody>
       </p:sp>
       <p:pic>
         <p:nvPicPr>
@@ -50468,6 +51453,10 @@
           </a:solidFill>
           <a:ln/>
         </p:spPr>
+        <p:txBody>
+          <a:bodyPr/>
+          <a:p/>
+        </p:txBody>
       </p:sp>
       <p:pic>
         <p:nvPicPr>
@@ -50714,6 +51703,10 @@
           </a:solidFill>
           <a:ln/>
         </p:spPr>
+        <p:txBody>
+          <a:bodyPr/>
+          <a:p/>
+        </p:txBody>
       </p:sp>
       <p:pic>
         <p:nvPicPr>
@@ -50808,6 +51801,10 @@
           </a:solidFill>
           <a:ln/>
         </p:spPr>
+        <p:txBody>
+          <a:bodyPr/>
+          <a:p/>
+        </p:txBody>
       </p:sp>
       <p:pic>
         <p:nvPicPr>
@@ -50902,6 +51899,10 @@
           </a:solidFill>
           <a:ln/>
         </p:spPr>
+        <p:txBody>
+          <a:bodyPr/>
+          <a:p/>
+        </p:txBody>
       </p:sp>
       <p:pic>
         <p:nvPicPr>
@@ -50996,6 +51997,10 @@
           </a:solidFill>
           <a:ln/>
         </p:spPr>
+        <p:txBody>
+          <a:bodyPr/>
+          <a:p/>
+        </p:txBody>
       </p:sp>
       <p:pic>
         <p:nvPicPr>
@@ -51090,6 +52095,10 @@
           </a:solidFill>
           <a:ln/>
         </p:spPr>
+        <p:txBody>
+          <a:bodyPr/>
+          <a:p/>
+        </p:txBody>
       </p:sp>
       <p:pic>
         <p:nvPicPr>
@@ -51184,6 +52193,10 @@
           </a:solidFill>
           <a:ln/>
         </p:spPr>
+        <p:txBody>
+          <a:bodyPr/>
+          <a:p/>
+        </p:txBody>
       </p:sp>
       <p:pic>
         <p:nvPicPr>
@@ -51278,6 +52291,10 @@
           </a:solidFill>
           <a:ln/>
         </p:spPr>
+        <p:txBody>
+          <a:bodyPr/>
+          <a:p/>
+        </p:txBody>
       </p:sp>
       <p:pic>
         <p:nvPicPr>
@@ -51372,6 +52389,10 @@
           </a:solidFill>
           <a:ln/>
         </p:spPr>
+        <p:txBody>
+          <a:bodyPr/>
+          <a:p/>
+        </p:txBody>
       </p:sp>
       <p:pic>
         <p:nvPicPr>
@@ -51466,6 +52487,10 @@
           </a:solidFill>
           <a:ln/>
         </p:spPr>
+        <p:txBody>
+          <a:bodyPr/>
+          <a:p/>
+        </p:txBody>
       </p:sp>
       <p:pic>
         <p:nvPicPr>
@@ -51560,6 +52585,10 @@
           </a:solidFill>
           <a:ln/>
         </p:spPr>
+        <p:txBody>
+          <a:bodyPr/>
+          <a:p/>
+        </p:txBody>
       </p:sp>
       <p:pic>
         <p:nvPicPr>
@@ -51654,6 +52683,10 @@
           </a:solidFill>
           <a:ln/>
         </p:spPr>
+        <p:txBody>
+          <a:bodyPr/>
+          <a:p/>
+        </p:txBody>
       </p:sp>
       <p:pic>
         <p:nvPicPr>
@@ -51748,6 +52781,10 @@
           </a:solidFill>
           <a:ln/>
         </p:spPr>
+        <p:txBody>
+          <a:bodyPr/>
+          <a:p/>
+        </p:txBody>
       </p:sp>
       <p:pic>
         <p:nvPicPr>
@@ -52280,6 +53317,10 @@
           </a:solidFill>
           <a:ln/>
         </p:spPr>
+        <p:txBody>
+          <a:bodyPr/>
+          <a:p/>
+        </p:txBody>
       </p:sp>
       <p:pic>
         <p:nvPicPr>
@@ -52360,6 +53401,10 @@
           </a:solidFill>
           <a:ln/>
         </p:spPr>
+        <p:txBody>
+          <a:bodyPr/>
+          <a:p/>
+        </p:txBody>
       </p:sp>
       <p:pic>
         <p:nvPicPr>
@@ -52440,6 +53485,10 @@
           </a:solidFill>
           <a:ln/>
         </p:spPr>
+        <p:txBody>
+          <a:bodyPr/>
+          <a:p/>
+        </p:txBody>
       </p:sp>
       <p:pic>
         <p:nvPicPr>
@@ -52520,6 +53569,10 @@
           </a:solidFill>
           <a:ln/>
         </p:spPr>
+        <p:txBody>
+          <a:bodyPr/>
+          <a:p/>
+        </p:txBody>
       </p:sp>
       <p:pic>
         <p:nvPicPr>
@@ -52636,6 +53689,10 @@
           </a:solidFill>
           <a:ln/>
         </p:spPr>
+        <p:txBody>
+          <a:bodyPr/>
+          <a:p/>
+        </p:txBody>
       </p:sp>
       <p:pic>
         <p:nvPicPr>
@@ -52716,6 +53773,10 @@
           </a:solidFill>
           <a:ln/>
         </p:spPr>
+        <p:txBody>
+          <a:bodyPr/>
+          <a:p/>
+        </p:txBody>
       </p:sp>
       <p:pic>
         <p:nvPicPr>
@@ -52796,6 +53857,10 @@
           </a:solidFill>
           <a:ln/>
         </p:spPr>
+        <p:txBody>
+          <a:bodyPr/>
+          <a:p/>
+        </p:txBody>
       </p:sp>
       <p:pic>
         <p:nvPicPr>
@@ -54072,6 +55137,607 @@
 </p:sld>
 </file>
 
+<file path=ppt/slides/slide44.xml><?xml version="1.0" encoding="utf-8"?>
+<p:sld xmlns:a="http://schemas.openxmlformats.org/drawingml/2006/main" xmlns:p="http://schemas.openxmlformats.org/presentationml/2006/main" xmlns:r="http://schemas.openxmlformats.org/officeDocument/2006/relationships">
+  <p:cSld>
+    <p:spTree>
+      <p:nvGrpSpPr>
+        <p:cNvPr id="1" name=""/>
+        <p:cNvGrpSpPr/>
+        <p:nvPr/>
+      </p:nvGrpSpPr>
+      <p:grpSpPr/>
+      <p:sp>
+        <p:nvSpPr>
+          <p:cNvPr id="2" name="Title 1"/>
+          <p:cNvSpPr>
+            <a:spLocks noGrp="1"/>
+          </p:cNvSpPr>
+          <p:nvPr>
+            <p:ph type="title" idx="100"/>
+          </p:nvPr>
+        </p:nvSpPr>
+        <p:spPr/>
+        <p:txBody>
+          <a:bodyPr/>
+          <a:lstStyle/>
+          <a:p>
+            <a:r>
+              <a:t>What changed on 30 October 2026</a:t>
+            </a:r>
+          </a:p>
+        </p:txBody>
+      </p:sp>
+      <p:sp>
+        <p:nvSpPr>
+          <p:cNvPr id="3" name="Text Placeholder 2"/>
+          <p:cNvSpPr>
+            <a:spLocks noGrp="1"/>
+          </p:cNvSpPr>
+          <p:nvPr>
+            <p:ph type="body" idx="101"/>
+          </p:nvPr>
+        </p:nvSpPr>
+        <p:spPr/>
+        <p:txBody>
+          <a:bodyPr/>
+          <a:lstStyle/>
+          <a:p>
+            <a:r>
+              <a:t>Security review, the reviews engine and naming: what this deck does not show yet</a:t>
+            </a:r>
+          </a:p>
+        </p:txBody>
+      </p:sp>
+      <p:sp>
+        <p:nvSpPr>
+          <p:cNvPr id="4" name="Rounded Rectangle 3"/>
+          <p:cNvSpPr/>
+          <p:nvPr/>
+        </p:nvSpPr>
+        <p:spPr>
+          <a:xfrm>
+            <a:off x="548640" y="1600200"/>
+            <a:ext cx="5440680" cy="2240280"/>
+          </a:xfrm>
+          <a:prstGeom prst="roundRect">
+            <a:avLst>
+              <a:gd name="adj" fmla="val 5000"/>
+            </a:avLst>
+          </a:prstGeom>
+          <a:solidFill>
+            <a:srgbClr val="F2F4F7"/>
+          </a:solidFill>
+          <a:ln>
+            <a:noFill/>
+          </a:ln>
+          <a:effectLst/>
+        </p:spPr>
+        <p:style>
+          <a:lnRef idx="1">
+            <a:schemeClr val="accent1"/>
+          </a:lnRef>
+          <a:fillRef idx="3">
+            <a:schemeClr val="accent1"/>
+          </a:fillRef>
+          <a:effectRef idx="2">
+            <a:schemeClr val="accent1"/>
+          </a:effectRef>
+          <a:fontRef idx="minor">
+            <a:schemeClr val="lt1"/>
+          </a:fontRef>
+        </p:style>
+        <p:txBody>
+          <a:bodyPr rtlCol="0" anchor="ctr"/>
+          <a:lstStyle/>
+          <a:p>
+            <a:pPr algn="ctr"/>
+          </a:p>
+        </p:txBody>
+      </p:sp>
+      <p:sp>
+        <p:nvSpPr>
+          <p:cNvPr id="5" name="TextBox 4"/>
+          <p:cNvSpPr txBox="1"/>
+          <p:nvPr/>
+        </p:nvSpPr>
+        <p:spPr>
+          <a:xfrm>
+            <a:off x="777240" y="1737360"/>
+            <a:ext cx="4983480" cy="1965960"/>
+          </a:xfrm>
+          <a:prstGeom prst="rect">
+            <a:avLst/>
+          </a:prstGeom>
+          <a:noFill/>
+        </p:spPr>
+        <p:txBody>
+          <a:bodyPr wrap="square" anchor="t">
+            <a:spAutoFit/>
+          </a:bodyPr>
+          <a:lstStyle/>
+          <a:p>
+            <a:r>
+              <a:rPr sz="1700" b="1">
+                <a:solidFill>
+                  <a:srgbClr val="1D2939"/>
+                </a:solidFill>
+              </a:rPr>
+              <a:t>Security review</a:t>
+            </a:r>
+          </a:p>
+          <a:p>
+            <a:pPr>
+              <a:spcBef>
+                <a:spcPts val="400"/>
+              </a:spcBef>
+            </a:pPr>
+            <a:r>
+              <a:rPr sz="1300">
+                <a:solidFill>
+                  <a:srgbClr val="344054"/>
+                </a:solidFill>
+              </a:rPr>
+              <a:t>•  Web sessions: refresh token in an HttpOnly, Secure, SameSite=Strict cookie</a:t>
+            </a:r>
+          </a:p>
+          <a:p>
+            <a:pPr>
+              <a:spcBef>
+                <a:spcPts val="400"/>
+              </a:spcBef>
+            </a:pPr>
+            <a:r>
+              <a:rPr sz="1300">
+                <a:solidFill>
+                  <a:srgbClr val="344054"/>
+                </a:solidFill>
+              </a:rPr>
+              <a:t>•  Passwords: 10+ characters, letter and digit; common, sequence and personal ones refused</a:t>
+            </a:r>
+          </a:p>
+          <a:p>
+            <a:pPr>
+              <a:spcBef>
+                <a:spcPts val="400"/>
+              </a:spcBef>
+            </a:pPr>
+            <a:r>
+              <a:rPr sz="1300">
+                <a:solidFill>
+                  <a:srgbClr val="344054"/>
+                </a:solidFill>
+              </a:rPr>
+              <a:t>•  Rate limits keyed on Railway’s X-Real-IP; https-only image links; masked query strings in logs</a:t>
+            </a:r>
+          </a:p>
+          <a:p>
+            <a:pPr>
+              <a:spcBef>
+                <a:spcPts val="400"/>
+              </a:spcBef>
+            </a:pPr>
+            <a:r>
+              <a:rPr sz="1300">
+                <a:solidFill>
+                  <a:srgbClr val="344054"/>
+                </a:solidFill>
+              </a:rPr>
+              <a:t>•  npm audit: 0 vulnerabilities in all three apps</a:t>
+            </a:r>
+          </a:p>
+        </p:txBody>
+      </p:sp>
+      <p:sp>
+        <p:nvSpPr>
+          <p:cNvPr id="6" name="Rounded Rectangle 5"/>
+          <p:cNvSpPr/>
+          <p:nvPr/>
+        </p:nvSpPr>
+        <p:spPr>
+          <a:xfrm>
+            <a:off x="6217920" y="1600200"/>
+            <a:ext cx="5440680" cy="2240280"/>
+          </a:xfrm>
+          <a:prstGeom prst="roundRect">
+            <a:avLst>
+              <a:gd name="adj" fmla="val 5000"/>
+            </a:avLst>
+          </a:prstGeom>
+          <a:solidFill>
+            <a:srgbClr val="F2F4F7"/>
+          </a:solidFill>
+          <a:ln>
+            <a:noFill/>
+          </a:ln>
+          <a:effectLst/>
+        </p:spPr>
+        <p:style>
+          <a:lnRef idx="1">
+            <a:schemeClr val="accent1"/>
+          </a:lnRef>
+          <a:fillRef idx="3">
+            <a:schemeClr val="accent1"/>
+          </a:fillRef>
+          <a:effectRef idx="2">
+            <a:schemeClr val="accent1"/>
+          </a:effectRef>
+          <a:fontRef idx="minor">
+            <a:schemeClr val="lt1"/>
+          </a:fontRef>
+        </p:style>
+        <p:txBody>
+          <a:bodyPr rtlCol="0" anchor="ctr"/>
+          <a:lstStyle/>
+          <a:p>
+            <a:pPr algn="ctr"/>
+          </a:p>
+        </p:txBody>
+      </p:sp>
+      <p:sp>
+        <p:nvSpPr>
+          <p:cNvPr id="7" name="TextBox 6"/>
+          <p:cNvSpPr txBox="1"/>
+          <p:nvPr/>
+        </p:nvSpPr>
+        <p:spPr>
+          <a:xfrm>
+            <a:off x="6446520" y="1737360"/>
+            <a:ext cx="4983480" cy="1965960"/>
+          </a:xfrm>
+          <a:prstGeom prst="rect">
+            <a:avLst/>
+          </a:prstGeom>
+          <a:noFill/>
+        </p:spPr>
+        <p:txBody>
+          <a:bodyPr wrap="square" anchor="t">
+            <a:spAutoFit/>
+          </a:bodyPr>
+          <a:lstStyle/>
+          <a:p>
+            <a:r>
+              <a:rPr sz="1700" b="1">
+                <a:solidFill>
+                  <a:srgbClr val="1D2939"/>
+                </a:solidFill>
+              </a:rPr>
+              <a:t>Reviews engine</a:t>
+            </a:r>
+          </a:p>
+          <a:p>
+            <a:pPr>
+              <a:spcBef>
+                <a:spcPts val="400"/>
+              </a:spcBef>
+            </a:pPr>
+            <a:r>
+              <a:rPr sz="1300">
+                <a:solidFill>
+                  <a:srgbClr val="344054"/>
+                </a:solidFill>
+              </a:rPr>
+              <a:t>•  Review prompt after payment, one reminder after 24 h (ReviewReminder: 14 event types now)</a:t>
+            </a:r>
+          </a:p>
+          <a:p>
+            <a:pPr>
+              <a:spcBef>
+                <a:spcPts val="400"/>
+              </a:spcBef>
+            </a:pPr>
+            <a:r>
+              <a:rPr sz="1300">
+                <a:solidFill>
+                  <a:srgbClr val="344054"/>
+                </a:solidFill>
+              </a:rPr>
+              <a:t>•  Public page per verified worker: /public/workers/{id} and its reviews</a:t>
+            </a:r>
+          </a:p>
+          <a:p>
+            <a:pPr>
+              <a:spcBef>
+                <a:spcPts val="400"/>
+              </a:spcBef>
+            </a:pPr>
+            <a:r>
+              <a:rPr sz="1300">
+                <a:solidFill>
+                  <a:srgbClr val="344054"/>
+                </a:solidFill>
+              </a:rPr>
+              <a:t>•  Workers reply to reviews; share-my-profile card in the partner app</a:t>
+            </a:r>
+          </a:p>
+          <a:p>
+            <a:pPr>
+              <a:spcBef>
+                <a:spcPts val="400"/>
+              </a:spcBef>
+            </a:pPr>
+            <a:r>
+              <a:rPr sz="1300">
+                <a:solidFill>
+                  <a:srgbClr val="344054"/>
+                </a:solidFill>
+              </a:rPr>
+              <a:t>•  Booking-flow CI now covers prompt, moderation, public page and reply</a:t>
+            </a:r>
+          </a:p>
+        </p:txBody>
+      </p:sp>
+      <p:sp>
+        <p:nvSpPr>
+          <p:cNvPr id="8" name="Rounded Rectangle 7"/>
+          <p:cNvSpPr/>
+          <p:nvPr/>
+        </p:nvSpPr>
+        <p:spPr>
+          <a:xfrm>
+            <a:off x="548640" y="4069080"/>
+            <a:ext cx="5440680" cy="2240280"/>
+          </a:xfrm>
+          <a:prstGeom prst="roundRect">
+            <a:avLst>
+              <a:gd name="adj" fmla="val 5000"/>
+            </a:avLst>
+          </a:prstGeom>
+          <a:solidFill>
+            <a:srgbClr val="F2F4F7"/>
+          </a:solidFill>
+          <a:ln>
+            <a:noFill/>
+          </a:ln>
+          <a:effectLst/>
+        </p:spPr>
+        <p:style>
+          <a:lnRef idx="1">
+            <a:schemeClr val="accent1"/>
+          </a:lnRef>
+          <a:fillRef idx="3">
+            <a:schemeClr val="accent1"/>
+          </a:fillRef>
+          <a:effectRef idx="2">
+            <a:schemeClr val="accent1"/>
+          </a:effectRef>
+          <a:fontRef idx="minor">
+            <a:schemeClr val="lt1"/>
+          </a:fontRef>
+        </p:style>
+        <p:txBody>
+          <a:bodyPr rtlCol="0" anchor="ctr"/>
+          <a:lstStyle/>
+          <a:p>
+            <a:pPr algn="ctr"/>
+          </a:p>
+        </p:txBody>
+      </p:sp>
+      <p:sp>
+        <p:nvSpPr>
+          <p:cNvPr id="9" name="TextBox 8"/>
+          <p:cNvSpPr txBox="1"/>
+          <p:nvPr/>
+        </p:nvSpPr>
+        <p:spPr>
+          <a:xfrm>
+            <a:off x="777240" y="4206240"/>
+            <a:ext cx="4983480" cy="1965960"/>
+          </a:xfrm>
+          <a:prstGeom prst="rect">
+            <a:avLst/>
+          </a:prstGeom>
+          <a:noFill/>
+        </p:spPr>
+        <p:txBody>
+          <a:bodyPr wrap="square" anchor="t">
+            <a:spAutoFit/>
+          </a:bodyPr>
+          <a:lstStyle/>
+          <a:p>
+            <a:r>
+              <a:rPr sz="1700" b="1">
+                <a:solidFill>
+                  <a:srgbClr val="1D2939"/>
+                </a:solidFill>
+              </a:rPr>
+              <a:t>Names used everywhere</a:t>
+            </a:r>
+          </a:p>
+          <a:p>
+            <a:pPr>
+              <a:spcBef>
+                <a:spcPts val="400"/>
+              </a:spcBef>
+            </a:pPr>
+            <a:r>
+              <a:rPr sz="1300">
+                <a:solidFill>
+                  <a:srgbClr val="344054"/>
+                </a:solidFill>
+              </a:rPr>
+              <a:t>•  Apps: Ji-Hajoor (customers), Ji-Hajoor Pro (workers), Ji-Hajoor Admin (staff, My agency)</a:t>
+            </a:r>
+          </a:p>
+          <a:p>
+            <a:pPr>
+              <a:spcBef>
+                <a:spcPts val="400"/>
+              </a:spcBef>
+            </a:pPr>
+            <a:r>
+              <a:rPr sz="1300">
+                <a:solidFill>
+                  <a:srgbClr val="344054"/>
+                </a:solidFill>
+              </a:rPr>
+              <a:t>•  People: customer, worker (Provider in code), agency (Tenant in code)</a:t>
+            </a:r>
+          </a:p>
+          <a:p>
+            <a:pPr>
+              <a:spcBef>
+                <a:spcPts val="400"/>
+              </a:spcBef>
+            </a:pPr>
+            <a:r>
+              <a:rPr sz="1300">
+                <a:solidFill>
+                  <a:srgbClr val="344054"/>
+                </a:solidFill>
+              </a:rPr>
+              <a:t>•  Agencies invite workers; agency share 0–50% of the worker’s net</a:t>
+            </a:r>
+          </a:p>
+        </p:txBody>
+      </p:sp>
+      <p:sp>
+        <p:nvSpPr>
+          <p:cNvPr id="10" name="Rounded Rectangle 9"/>
+          <p:cNvSpPr/>
+          <p:nvPr/>
+        </p:nvSpPr>
+        <p:spPr>
+          <a:xfrm>
+            <a:off x="6217920" y="4069080"/>
+            <a:ext cx="5440680" cy="2240280"/>
+          </a:xfrm>
+          <a:prstGeom prst="roundRect">
+            <a:avLst>
+              <a:gd name="adj" fmla="val 5000"/>
+            </a:avLst>
+          </a:prstGeom>
+          <a:solidFill>
+            <a:srgbClr val="F2F4F7"/>
+          </a:solidFill>
+          <a:ln>
+            <a:noFill/>
+          </a:ln>
+          <a:effectLst/>
+        </p:spPr>
+        <p:style>
+          <a:lnRef idx="1">
+            <a:schemeClr val="accent1"/>
+          </a:lnRef>
+          <a:fillRef idx="3">
+            <a:schemeClr val="accent1"/>
+          </a:fillRef>
+          <a:effectRef idx="2">
+            <a:schemeClr val="accent1"/>
+          </a:effectRef>
+          <a:fontRef idx="minor">
+            <a:schemeClr val="lt1"/>
+          </a:fontRef>
+        </p:style>
+        <p:txBody>
+          <a:bodyPr rtlCol="0" anchor="ctr"/>
+          <a:lstStyle/>
+          <a:p>
+            <a:pPr algn="ctr"/>
+          </a:p>
+        </p:txBody>
+      </p:sp>
+      <p:sp>
+        <p:nvSpPr>
+          <p:cNvPr id="11" name="TextBox 10"/>
+          <p:cNvSpPr txBox="1"/>
+          <p:nvPr/>
+        </p:nvSpPr>
+        <p:spPr>
+          <a:xfrm>
+            <a:off x="6446520" y="4206240"/>
+            <a:ext cx="4983480" cy="1965960"/>
+          </a:xfrm>
+          <a:prstGeom prst="rect">
+            <a:avLst/>
+          </a:prstGeom>
+          <a:noFill/>
+        </p:spPr>
+        <p:txBody>
+          <a:bodyPr wrap="square" anchor="t">
+            <a:spAutoFit/>
+          </a:bodyPr>
+          <a:lstStyle/>
+          <a:p>
+            <a:r>
+              <a:rPr sz="1700" b="1">
+                <a:solidFill>
+                  <a:srgbClr val="1D2939"/>
+                </a:solidFill>
+              </a:rPr>
+              <a:t>Read next</a:t>
+            </a:r>
+          </a:p>
+          <a:p>
+            <a:pPr>
+              <a:spcBef>
+                <a:spcPts val="400"/>
+              </a:spcBef>
+            </a:pPr>
+            <a:r>
+              <a:rPr sz="1300">
+                <a:solidFill>
+                  <a:srgbClr val="344054"/>
+                </a:solidFill>
+              </a:rPr>
+              <a:t>•  JiHajoor_Tech_Stack.pptx: current stack and security state</a:t>
+            </a:r>
+          </a:p>
+          <a:p>
+            <a:pPr>
+              <a:spcBef>
+                <a:spcPts val="400"/>
+              </a:spcBef>
+            </a:pPr>
+            <a:r>
+              <a:rPr sz="1300">
+                <a:solidFill>
+                  <a:srgbClr val="344054"/>
+                </a:solidFill>
+              </a:rPr>
+              <a:t>•  JiHajoor_Pitch_Deck, Revenue_Model, Brand_and_Marketing</a:t>
+            </a:r>
+          </a:p>
+          <a:p>
+            <a:pPr>
+              <a:spcBef>
+                <a:spcPts val="400"/>
+              </a:spcBef>
+            </a:pPr>
+            <a:r>
+              <a:rPr sz="1300">
+                <a:solidFill>
+                  <a:srgbClr val="344054"/>
+                </a:solidFill>
+              </a:rPr>
+              <a:t>•  User guides: docs/guides/; PDFs in docs/pdf/</a:t>
+            </a:r>
+          </a:p>
+          <a:p>
+            <a:pPr>
+              <a:spcBef>
+                <a:spcPts val="400"/>
+              </a:spcBef>
+            </a:pPr>
+            <a:r>
+              <a:rPr sz="1300">
+                <a:solidFill>
+                  <a:srgbClr val="344054"/>
+                </a:solidFill>
+              </a:rPr>
+              <a:t>•  Security findings later in this deck show their state on 18 October</a:t>
+            </a:r>
+          </a:p>
+        </p:txBody>
+      </p:sp>
+    </p:spTree>
+  </p:cSld>
+  <p:clrMapOvr>
+    <a:masterClrMapping/>
+  </p:clrMapOvr>
+</p:sld>
+</file>
+
 <file path=ppt/slides/slide5.xml><?xml version="1.0" encoding="utf-8"?>
 <p:sld xmlns:a="http://schemas.openxmlformats.org/drawingml/2006/main" xmlns:r="http://schemas.openxmlformats.org/officeDocument/2006/relationships" xmlns:p="http://schemas.openxmlformats.org/presentationml/2006/main">
   <p:cSld name="Slide 5">
@@ -54302,6 +55968,10 @@
             <a:tailEnd type="triangle"/>
           </a:ln>
         </p:spPr>
+        <p:txBody>
+          <a:bodyPr/>
+          <a:p/>
+        </p:txBody>
       </p:sp>
       <p:sp>
         <p:nvSpPr>
@@ -54368,6 +56038,10 @@
             <a:tailEnd type="triangle"/>
           </a:ln>
         </p:spPr>
+        <p:txBody>
+          <a:bodyPr/>
+          <a:p/>
+        </p:txBody>
       </p:sp>
       <p:sp>
         <p:nvSpPr>
@@ -54434,6 +56108,10 @@
             <a:tailEnd type="triangle"/>
           </a:ln>
         </p:spPr>
+        <p:txBody>
+          <a:bodyPr/>
+          <a:p/>
+        </p:txBody>
       </p:sp>
       <p:sp>
         <p:nvSpPr>
@@ -54509,6 +56187,10 @@
             <a:tailEnd type="triangle"/>
           </a:ln>
         </p:spPr>
+        <p:txBody>
+          <a:bodyPr/>
+          <a:p/>
+        </p:txBody>
       </p:sp>
       <p:sp>
         <p:nvSpPr>
@@ -54763,6 +56445,10 @@
             <a:tailEnd type="triangle"/>
           </a:ln>
         </p:spPr>
+        <p:txBody>
+          <a:bodyPr/>
+          <a:p/>
+        </p:txBody>
       </p:sp>
       <p:sp>
         <p:nvSpPr>
@@ -55137,6 +56823,10 @@
             <a:tailEnd type="triangle"/>
           </a:ln>
         </p:spPr>
+        <p:txBody>
+          <a:bodyPr/>
+          <a:p/>
+        </p:txBody>
       </p:sp>
       <p:sp>
         <p:nvSpPr>
@@ -55311,6 +57001,10 @@
             <a:tailEnd type="triangle"/>
           </a:ln>
         </p:spPr>
+        <p:txBody>
+          <a:bodyPr/>
+          <a:p/>
+        </p:txBody>
       </p:sp>
       <p:sp>
         <p:nvSpPr>
@@ -56427,6 +58121,10 @@
           </a:solidFill>
           <a:ln/>
         </p:spPr>
+        <p:txBody>
+          <a:bodyPr/>
+          <a:p/>
+        </p:txBody>
       </p:sp>
       <p:pic>
         <p:nvPicPr>
@@ -56507,6 +58205,10 @@
           </a:solidFill>
           <a:ln/>
         </p:spPr>
+        <p:txBody>
+          <a:bodyPr/>
+          <a:p/>
+        </p:txBody>
       </p:sp>
       <p:pic>
         <p:nvPicPr>
@@ -56587,6 +58289,10 @@
           </a:solidFill>
           <a:ln/>
         </p:spPr>
+        <p:txBody>
+          <a:bodyPr/>
+          <a:p/>
+        </p:txBody>
       </p:sp>
       <p:pic>
         <p:nvPicPr>
@@ -56897,6 +58603,10 @@
             <a:tailEnd type="triangle"/>
           </a:ln>
         </p:spPr>
+        <p:txBody>
+          <a:bodyPr/>
+          <a:p/>
+        </p:txBody>
       </p:sp>
       <p:sp>
         <p:nvSpPr>
@@ -56921,6 +58631,10 @@
             <a:tailEnd type="triangle"/>
           </a:ln>
         </p:spPr>
+        <p:txBody>
+          <a:bodyPr/>
+          <a:p/>
+        </p:txBody>
       </p:sp>
       <p:sp>
         <p:nvSpPr>
@@ -57090,6 +58804,10 @@
             <a:tailEnd type="triangle"/>
           </a:ln>
         </p:spPr>
+        <p:txBody>
+          <a:bodyPr/>
+          <a:p/>
+        </p:txBody>
       </p:sp>
       <p:sp>
         <p:nvSpPr>
@@ -57189,6 +58907,10 @@
             <a:tailEnd type="triangle"/>
           </a:ln>
         </p:spPr>
+        <p:txBody>
+          <a:bodyPr/>
+          <a:p/>
+        </p:txBody>
       </p:sp>
       <p:sp>
         <p:nvSpPr>
@@ -57288,6 +59010,10 @@
             <a:tailEnd type="triangle"/>
           </a:ln>
         </p:spPr>
+        <p:txBody>
+          <a:bodyPr/>
+          <a:p/>
+        </p:txBody>
       </p:sp>
       <p:sp>
         <p:nvSpPr>
@@ -57387,6 +59113,10 @@
             <a:tailEnd type="triangle"/>
           </a:ln>
         </p:spPr>
+        <p:txBody>
+          <a:bodyPr/>
+          <a:p/>
+        </p:txBody>
       </p:sp>
       <p:sp>
         <p:nvSpPr>
@@ -57486,6 +59216,10 @@
             <a:tailEnd type="triangle"/>
           </a:ln>
         </p:spPr>
+        <p:txBody>
+          <a:bodyPr/>
+          <a:p/>
+        </p:txBody>
       </p:sp>
       <p:sp>
         <p:nvSpPr>
@@ -57585,6 +59319,10 @@
             <a:tailEnd type="triangle"/>
           </a:ln>
         </p:spPr>
+        <p:txBody>
+          <a:bodyPr/>
+          <a:p/>
+        </p:txBody>
       </p:sp>
       <p:sp>
         <p:nvSpPr>
@@ -57740,6 +59478,10 @@
             <a:tailEnd type="triangle"/>
           </a:ln>
         </p:spPr>
+        <p:txBody>
+          <a:bodyPr/>
+          <a:p/>
+        </p:txBody>
       </p:sp>
       <p:sp>
         <p:nvSpPr>
@@ -57825,6 +59567,10 @@
             <a:tailEnd type="triangle"/>
           </a:ln>
         </p:spPr>
+        <p:txBody>
+          <a:bodyPr/>
+          <a:p/>
+        </p:txBody>
       </p:sp>
       <p:sp>
         <p:nvSpPr>
@@ -57910,6 +59656,10 @@
             <a:tailEnd type="triangle"/>
           </a:ln>
         </p:spPr>
+        <p:txBody>
+          <a:bodyPr/>
+          <a:p/>
+        </p:txBody>
       </p:sp>
       <p:sp>
         <p:nvSpPr>
@@ -58035,6 +59785,10 @@
             <a:tailEnd type="triangle"/>
           </a:ln>
         </p:spPr>
+        <p:txBody>
+          <a:bodyPr/>
+          <a:p/>
+        </p:txBody>
       </p:sp>
       <p:sp>
         <p:nvSpPr>
@@ -58055,6 +59809,10 @@
           </a:solidFill>
           <a:ln/>
         </p:spPr>
+        <p:txBody>
+          <a:bodyPr/>
+          <a:p/>
+        </p:txBody>
       </p:sp>
       <p:pic>
         <p:nvPicPr>
@@ -58135,6 +59893,10 @@
           </a:solidFill>
           <a:ln/>
         </p:spPr>
+        <p:txBody>
+          <a:bodyPr/>
+          <a:p/>
+        </p:txBody>
       </p:sp>
       <p:pic>
         <p:nvPicPr>
@@ -58579,6 +60341,10 @@
           </a:solidFill>
           <a:ln/>
         </p:spPr>
+        <p:txBody>
+          <a:bodyPr/>
+          <a:p/>
+        </p:txBody>
       </p:sp>
       <p:pic>
         <p:nvPicPr>
@@ -58749,6 +60515,10 @@
           </a:solidFill>
           <a:ln/>
         </p:spPr>
+        <p:txBody>
+          <a:bodyPr/>
+          <a:p/>
+        </p:txBody>
       </p:sp>
       <p:pic>
         <p:nvPicPr>
@@ -58919,6 +60689,10 @@
           </a:solidFill>
           <a:ln/>
         </p:spPr>
+        <p:txBody>
+          <a:bodyPr/>
+          <a:p/>
+        </p:txBody>
       </p:sp>
       <p:pic>
         <p:nvPicPr>
@@ -59089,6 +60863,10 @@
           </a:solidFill>
           <a:ln/>
         </p:spPr>
+        <p:txBody>
+          <a:bodyPr/>
+          <a:p/>
+        </p:txBody>
       </p:sp>
       <p:pic>
         <p:nvPicPr>
@@ -59259,6 +61037,10 @@
           </a:solidFill>
           <a:ln/>
         </p:spPr>
+        <p:txBody>
+          <a:bodyPr/>
+          <a:p/>
+        </p:txBody>
       </p:sp>
       <p:pic>
         <p:nvPicPr>
@@ -59429,6 +61211,10 @@
           </a:solidFill>
           <a:ln/>
         </p:spPr>
+        <p:txBody>
+          <a:bodyPr/>
+          <a:p/>
+        </p:txBody>
       </p:sp>
       <p:pic>
         <p:nvPicPr>
@@ -59599,6 +61385,10 @@
           </a:solidFill>
           <a:ln/>
         </p:spPr>
+        <p:txBody>
+          <a:bodyPr/>
+          <a:p/>
+        </p:txBody>
       </p:sp>
       <p:pic>
         <p:nvPicPr>
@@ -59769,6 +61559,10 @@
           </a:solidFill>
           <a:ln/>
         </p:spPr>
+        <p:txBody>
+          <a:bodyPr/>
+          <a:p/>
+        </p:txBody>
       </p:sp>
       <p:pic>
         <p:nvPicPr>
@@ -59939,6 +61733,10 @@
           </a:solidFill>
           <a:ln/>
         </p:spPr>
+        <p:txBody>
+          <a:bodyPr/>
+          <a:p/>
+        </p:txBody>
       </p:sp>
       <p:pic>
         <p:nvPicPr>
@@ -60109,6 +61907,10 @@
           </a:solidFill>
           <a:ln/>
         </p:spPr>
+        <p:txBody>
+          <a:bodyPr/>
+          <a:p/>
+        </p:txBody>
       </p:sp>
       <p:pic>
         <p:nvPicPr>
@@ -60249,6 +62051,10 @@
             <a:tailEnd type="triangle"/>
           </a:ln>
         </p:spPr>
+        <p:txBody>
+          <a:bodyPr/>
+          <a:p/>
+        </p:txBody>
       </p:sp>
       <p:sp>
         <p:nvSpPr>
@@ -60273,6 +62079,10 @@
             <a:tailEnd type="triangle"/>
           </a:ln>
         </p:spPr>
+        <p:txBody>
+          <a:bodyPr/>
+          <a:p/>
+        </p:txBody>
       </p:sp>
       <p:sp>
         <p:nvSpPr>
@@ -60297,6 +62107,10 @@
             <a:tailEnd type="triangle"/>
           </a:ln>
         </p:spPr>
+        <p:txBody>
+          <a:bodyPr/>
+          <a:p/>
+        </p:txBody>
       </p:sp>
       <p:sp>
         <p:nvSpPr>
@@ -60321,6 +62135,10 @@
             <a:tailEnd type="triangle"/>
           </a:ln>
         </p:spPr>
+        <p:txBody>
+          <a:bodyPr/>
+          <a:p/>
+        </p:txBody>
       </p:sp>
       <p:sp>
         <p:nvSpPr>
@@ -60345,6 +62163,10 @@
             <a:tailEnd type="triangle"/>
           </a:ln>
         </p:spPr>
+        <p:txBody>
+          <a:bodyPr/>
+          <a:p/>
+        </p:txBody>
       </p:sp>
       <p:sp>
         <p:nvSpPr>
@@ -60369,6 +62191,10 @@
             <a:tailEnd type="triangle"/>
           </a:ln>
         </p:spPr>
+        <p:txBody>
+          <a:bodyPr/>
+          <a:p/>
+        </p:txBody>
       </p:sp>
       <p:sp>
         <p:nvSpPr>
@@ -60393,6 +62219,10 @@
             <a:tailEnd type="triangle"/>
           </a:ln>
         </p:spPr>
+        <p:txBody>
+          <a:bodyPr/>
+          <a:p/>
+        </p:txBody>
       </p:sp>
       <p:sp>
         <p:nvSpPr>
@@ -60417,6 +62247,10 @@
             <a:tailEnd type="triangle"/>
           </a:ln>
         </p:spPr>
+        <p:txBody>
+          <a:bodyPr/>
+          <a:p/>
+        </p:txBody>
       </p:sp>
       <p:sp>
         <p:nvSpPr>
@@ -60441,6 +62275,10 @@
             <a:tailEnd type="triangle"/>
           </a:ln>
         </p:spPr>
+        <p:txBody>
+          <a:bodyPr/>
+          <a:p/>
+        </p:txBody>
       </p:sp>
       <p:sp>
         <p:nvSpPr>
